--- a/src/core/pptx/__tests__/fixtures/e2e/chart-gallery.pptx
+++ b/src/core/pptx/__tests__/fixtures/e2e/chart-gallery.pptx
@@ -489,6 +489,7 @@
     <cx:title>
       <cx:tx>
         <cx:rich>
+          <a:bodyPr/>
           <a:p>
             <a:r>
               <a:t>Funnel</a:t>
@@ -568,6 +569,7 @@
     <cx:title>
       <cx:tx>
         <cx:rich>
+          <a:bodyPr/>
           <a:p>
             <a:r>
               <a:t>Sunburst</a:t>
@@ -641,6 +643,7 @@
     <cx:title>
       <cx:tx>
         <cx:rich>
+          <a:bodyPr/>
           <a:p>
             <a:r>
               <a:t>Histogram</a:t>
@@ -651,7 +654,7 @@
     </cx:title>
     <cx:plotArea>
       <cx:plotAreaRegion>
-        <cx:series layoutId="histogram" uniqueId="{00000000-0000-0000-0000-000000000000}">
+        <cx:series layoutId="clusteredColumn" uniqueId="{00000000-0000-0000-0000-000000000000}">
           <cx:tx>
             <cx:txData>
               <cx:f>Sheet1!$B$1</cx:f>
@@ -664,6 +667,11 @@
             </a:solidFill>
           </cx:spPr>
           <cx:dataId val="0"/>
+          <cx:layoutPr>
+            <cx:binning intervalClosed="r">
+              <cx:binCount val="4"/>
+            </cx:binning>
+          </cx:layoutPr>
         </cx:series>
       </cx:plotAreaRegion>
     </cx:plotArea>
@@ -740,6 +748,7 @@
     <cx:title>
       <cx:tx>
         <cx:rich>
+          <a:bodyPr/>
           <a:p>
             <a:r>
               <a:t>Box-Whisker</a:t>
@@ -1619,6 +1628,7 @@
     <cx:title>
       <cx:tx>
         <cx:rich>
+          <a:bodyPr/>
           <a:p>
             <a:r>
               <a:t>Waterfall</a:t>
@@ -1678,6 +1688,7 @@
     <cx:title>
       <cx:tx>
         <cx:rich>
+          <a:bodyPr/>
           <a:p>
             <a:r>
               <a:t>Treemap</a:t>
@@ -1925,6 +1936,7 @@
     <cx:title>
       <cx:tx>
         <cx:rich>
+          <a:bodyPr/>
           <a:p>
             <a:r>
               <a:t>Region Map</a:t>
@@ -3200,6 +3212,3842 @@
     <c:plotVisOnly val="1"/>
   </c:chart>
 </c:chartSpace>
+</file>
+
+<file path=ppt/charts/colors11.xml><?xml version="1.0" encoding="utf-8"?>
+<cs:colorStyle xmlns:cs="http://schemas.microsoft.com/office/drawing/2012/chartStyle" xmlns:a="http://schemas.openxmlformats.org/drawingml/2006/main" meth="cycle" id="10">
+  <a:schemeClr val="accent1"/>
+  <a:schemeClr val="accent2"/>
+  <a:schemeClr val="accent3"/>
+  <a:schemeClr val="accent4"/>
+  <a:schemeClr val="accent5"/>
+  <a:schemeClr val="accent6"/>
+  <cs:variation/>
+  <cs:variation>
+    <a:lumMod val="60000"/>
+  </cs:variation>
+  <cs:variation>
+    <a:lumMod val="80000"/>
+    <a:lumOff val="20000"/>
+  </cs:variation>
+  <cs:variation>
+    <a:lumMod val="80000"/>
+  </cs:variation>
+  <cs:variation>
+    <a:lumMod val="60000"/>
+    <a:lumOff val="40000"/>
+  </cs:variation>
+  <cs:variation>
+    <a:lumMod val="50000"/>
+  </cs:variation>
+  <cs:variation>
+    <a:lumMod val="70000"/>
+    <a:lumOff val="30000"/>
+  </cs:variation>
+  <cs:variation>
+    <a:lumMod val="70000"/>
+  </cs:variation>
+  <cs:variation>
+    <a:lumMod val="50000"/>
+    <a:lumOff val="50000"/>
+  </cs:variation>
+</cs:colorStyle>
+</file>
+
+<file path=ppt/charts/colors12.xml><?xml version="1.0" encoding="utf-8"?>
+<cs:colorStyle xmlns:cs="http://schemas.microsoft.com/office/drawing/2012/chartStyle" xmlns:a="http://schemas.openxmlformats.org/drawingml/2006/main" meth="cycle" id="10">
+  <a:schemeClr val="accent1"/>
+  <a:schemeClr val="accent2"/>
+  <a:schemeClr val="accent3"/>
+  <a:schemeClr val="accent4"/>
+  <a:schemeClr val="accent5"/>
+  <a:schemeClr val="accent6"/>
+  <cs:variation/>
+  <cs:variation>
+    <a:lumMod val="60000"/>
+  </cs:variation>
+  <cs:variation>
+    <a:lumMod val="80000"/>
+    <a:lumOff val="20000"/>
+  </cs:variation>
+  <cs:variation>
+    <a:lumMod val="80000"/>
+  </cs:variation>
+  <cs:variation>
+    <a:lumMod val="60000"/>
+    <a:lumOff val="40000"/>
+  </cs:variation>
+  <cs:variation>
+    <a:lumMod val="50000"/>
+  </cs:variation>
+  <cs:variation>
+    <a:lumMod val="70000"/>
+    <a:lumOff val="30000"/>
+  </cs:variation>
+  <cs:variation>
+    <a:lumMod val="70000"/>
+  </cs:variation>
+  <cs:variation>
+    <a:lumMod val="50000"/>
+    <a:lumOff val="50000"/>
+  </cs:variation>
+</cs:colorStyle>
+</file>
+
+<file path=ppt/charts/colors13.xml><?xml version="1.0" encoding="utf-8"?>
+<cs:colorStyle xmlns:cs="http://schemas.microsoft.com/office/drawing/2012/chartStyle" xmlns:a="http://schemas.openxmlformats.org/drawingml/2006/main" meth="cycle" id="10">
+  <a:schemeClr val="accent1"/>
+  <a:schemeClr val="accent2"/>
+  <a:schemeClr val="accent3"/>
+  <a:schemeClr val="accent4"/>
+  <a:schemeClr val="accent5"/>
+  <a:schemeClr val="accent6"/>
+  <cs:variation/>
+  <cs:variation>
+    <a:lumMod val="60000"/>
+  </cs:variation>
+  <cs:variation>
+    <a:lumMod val="80000"/>
+    <a:lumOff val="20000"/>
+  </cs:variation>
+  <cs:variation>
+    <a:lumMod val="80000"/>
+  </cs:variation>
+  <cs:variation>
+    <a:lumMod val="60000"/>
+    <a:lumOff val="40000"/>
+  </cs:variation>
+  <cs:variation>
+    <a:lumMod val="50000"/>
+  </cs:variation>
+  <cs:variation>
+    <a:lumMod val="70000"/>
+    <a:lumOff val="30000"/>
+  </cs:variation>
+  <cs:variation>
+    <a:lumMod val="70000"/>
+  </cs:variation>
+  <cs:variation>
+    <a:lumMod val="50000"/>
+    <a:lumOff val="50000"/>
+  </cs:variation>
+</cs:colorStyle>
+</file>
+
+<file path=ppt/charts/colors14.xml><?xml version="1.0" encoding="utf-8"?>
+<cs:colorStyle xmlns:cs="http://schemas.microsoft.com/office/drawing/2012/chartStyle" xmlns:a="http://schemas.openxmlformats.org/drawingml/2006/main" meth="cycle" id="10">
+  <a:schemeClr val="accent1"/>
+  <a:schemeClr val="accent2"/>
+  <a:schemeClr val="accent3"/>
+  <a:schemeClr val="accent4"/>
+  <a:schemeClr val="accent5"/>
+  <a:schemeClr val="accent6"/>
+  <cs:variation/>
+  <cs:variation>
+    <a:lumMod val="60000"/>
+  </cs:variation>
+  <cs:variation>
+    <a:lumMod val="80000"/>
+    <a:lumOff val="20000"/>
+  </cs:variation>
+  <cs:variation>
+    <a:lumMod val="80000"/>
+  </cs:variation>
+  <cs:variation>
+    <a:lumMod val="60000"/>
+    <a:lumOff val="40000"/>
+  </cs:variation>
+  <cs:variation>
+    <a:lumMod val="50000"/>
+  </cs:variation>
+  <cs:variation>
+    <a:lumMod val="70000"/>
+    <a:lumOff val="30000"/>
+  </cs:variation>
+  <cs:variation>
+    <a:lumMod val="70000"/>
+  </cs:variation>
+  <cs:variation>
+    <a:lumMod val="50000"/>
+    <a:lumOff val="50000"/>
+  </cs:variation>
+</cs:colorStyle>
+</file>
+
+<file path=ppt/charts/colors18.xml><?xml version="1.0" encoding="utf-8"?>
+<cs:colorStyle xmlns:cs="http://schemas.microsoft.com/office/drawing/2012/chartStyle" xmlns:a="http://schemas.openxmlformats.org/drawingml/2006/main" meth="cycle" id="10">
+  <a:schemeClr val="accent1"/>
+  <a:schemeClr val="accent2"/>
+  <a:schemeClr val="accent3"/>
+  <a:schemeClr val="accent4"/>
+  <a:schemeClr val="accent5"/>
+  <a:schemeClr val="accent6"/>
+  <cs:variation/>
+  <cs:variation>
+    <a:lumMod val="60000"/>
+  </cs:variation>
+  <cs:variation>
+    <a:lumMod val="80000"/>
+    <a:lumOff val="20000"/>
+  </cs:variation>
+  <cs:variation>
+    <a:lumMod val="80000"/>
+  </cs:variation>
+  <cs:variation>
+    <a:lumMod val="60000"/>
+    <a:lumOff val="40000"/>
+  </cs:variation>
+  <cs:variation>
+    <a:lumMod val="50000"/>
+  </cs:variation>
+  <cs:variation>
+    <a:lumMod val="70000"/>
+    <a:lumOff val="30000"/>
+  </cs:variation>
+  <cs:variation>
+    <a:lumMod val="70000"/>
+  </cs:variation>
+  <cs:variation>
+    <a:lumMod val="50000"/>
+    <a:lumOff val="50000"/>
+  </cs:variation>
+</cs:colorStyle>
+</file>
+
+<file path=ppt/charts/colors19.xml><?xml version="1.0" encoding="utf-8"?>
+<cs:colorStyle xmlns:cs="http://schemas.microsoft.com/office/drawing/2012/chartStyle" xmlns:a="http://schemas.openxmlformats.org/drawingml/2006/main" meth="cycle" id="10">
+  <a:schemeClr val="accent1"/>
+  <a:schemeClr val="accent2"/>
+  <a:schemeClr val="accent3"/>
+  <a:schemeClr val="accent4"/>
+  <a:schemeClr val="accent5"/>
+  <a:schemeClr val="accent6"/>
+  <cs:variation/>
+  <cs:variation>
+    <a:lumMod val="60000"/>
+  </cs:variation>
+  <cs:variation>
+    <a:lumMod val="80000"/>
+    <a:lumOff val="20000"/>
+  </cs:variation>
+  <cs:variation>
+    <a:lumMod val="80000"/>
+  </cs:variation>
+  <cs:variation>
+    <a:lumMod val="60000"/>
+    <a:lumOff val="40000"/>
+  </cs:variation>
+  <cs:variation>
+    <a:lumMod val="50000"/>
+  </cs:variation>
+  <cs:variation>
+    <a:lumMod val="70000"/>
+    <a:lumOff val="30000"/>
+  </cs:variation>
+  <cs:variation>
+    <a:lumMod val="70000"/>
+  </cs:variation>
+  <cs:variation>
+    <a:lumMod val="50000"/>
+    <a:lumOff val="50000"/>
+  </cs:variation>
+</cs:colorStyle>
+</file>
+
+<file path=ppt/charts/colors20.xml><?xml version="1.0" encoding="utf-8"?>
+<cs:colorStyle xmlns:cs="http://schemas.microsoft.com/office/drawing/2012/chartStyle" xmlns:a="http://schemas.openxmlformats.org/drawingml/2006/main" meth="cycle" id="10">
+  <a:schemeClr val="accent1"/>
+  <a:schemeClr val="accent2"/>
+  <a:schemeClr val="accent3"/>
+  <a:schemeClr val="accent4"/>
+  <a:schemeClr val="accent5"/>
+  <a:schemeClr val="accent6"/>
+  <cs:variation/>
+  <cs:variation>
+    <a:lumMod val="60000"/>
+  </cs:variation>
+  <cs:variation>
+    <a:lumMod val="80000"/>
+    <a:lumOff val="20000"/>
+  </cs:variation>
+  <cs:variation>
+    <a:lumMod val="80000"/>
+  </cs:variation>
+  <cs:variation>
+    <a:lumMod val="60000"/>
+    <a:lumOff val="40000"/>
+  </cs:variation>
+  <cs:variation>
+    <a:lumMod val="50000"/>
+  </cs:variation>
+  <cs:variation>
+    <a:lumMod val="70000"/>
+    <a:lumOff val="30000"/>
+  </cs:variation>
+  <cs:variation>
+    <a:lumMod val="70000"/>
+  </cs:variation>
+  <cs:variation>
+    <a:lumMod val="50000"/>
+    <a:lumOff val="50000"/>
+  </cs:variation>
+</cs:colorStyle>
+</file>
+
+<file path=ppt/charts/style11.xml><?xml version="1.0" encoding="utf-8"?>
+<cs:chartStyle xmlns:cs="http://schemas.microsoft.com/office/drawing/2012/chartStyle" xmlns:a="http://schemas.openxmlformats.org/drawingml/2006/main" id="419">
+  <cs:axisTitle>
+    <cs:lnRef idx="0"/>
+    <cs:fillRef idx="0"/>
+    <cs:effectRef idx="0"/>
+    <cs:fontRef idx="minor">
+      <a:schemeClr val="tx1">
+        <a:lumMod val="65000"/>
+        <a:lumOff val="35000"/>
+      </a:schemeClr>
+    </cs:fontRef>
+    <cs:defRPr sz="1197"/>
+  </cs:axisTitle>
+  <cs:categoryAxis>
+    <cs:lnRef idx="0"/>
+    <cs:fillRef idx="0"/>
+    <cs:effectRef idx="0"/>
+    <cs:fontRef idx="minor">
+      <a:schemeClr val="tx1">
+        <a:lumMod val="65000"/>
+        <a:lumOff val="35000"/>
+      </a:schemeClr>
+    </cs:fontRef>
+    <cs:spPr>
+      <a:ln w="9525" cap="flat" cmpd="sng" algn="ctr">
+        <a:solidFill>
+          <a:schemeClr val="tx1">
+            <a:lumMod val="15000"/>
+            <a:lumOff val="85000"/>
+          </a:schemeClr>
+        </a:solidFill>
+        <a:round/>
+      </a:ln>
+    </cs:spPr>
+    <cs:defRPr sz="1197"/>
+  </cs:categoryAxis>
+  <cs:chartArea mods="allowNoFillOverride allowNoLineOverride">
+    <cs:lnRef idx="0"/>
+    <cs:fillRef idx="0"/>
+    <cs:effectRef idx="0"/>
+    <cs:fontRef idx="minor">
+      <a:schemeClr val="tx1"/>
+    </cs:fontRef>
+    <cs:spPr>
+      <a:solidFill>
+        <a:schemeClr val="bg1"/>
+      </a:solidFill>
+      <a:ln w="9525" cap="flat" cmpd="sng" algn="ctr">
+        <a:solidFill>
+          <a:schemeClr val="tx1">
+            <a:lumMod val="15000"/>
+            <a:lumOff val="85000"/>
+          </a:schemeClr>
+        </a:solidFill>
+        <a:round/>
+      </a:ln>
+    </cs:spPr>
+    <cs:defRPr sz="1330"/>
+  </cs:chartArea>
+  <cs:dataLabel>
+    <cs:lnRef idx="0"/>
+    <cs:fillRef idx="0"/>
+    <cs:effectRef idx="0"/>
+    <cs:fontRef idx="minor">
+      <a:schemeClr val="tx1">
+        <a:lumMod val="65000"/>
+        <a:lumOff val="35000"/>
+      </a:schemeClr>
+    </cs:fontRef>
+    <cs:defRPr sz="1197"/>
+  </cs:dataLabel>
+  <cs:dataLabelCallout>
+    <cs:lnRef idx="0"/>
+    <cs:fillRef idx="0"/>
+    <cs:effectRef idx="0"/>
+    <cs:fontRef idx="minor">
+      <a:schemeClr val="dk1">
+        <a:lumMod val="65000"/>
+        <a:lumOff val="35000"/>
+      </a:schemeClr>
+    </cs:fontRef>
+    <cs:spPr>
+      <a:solidFill>
+        <a:schemeClr val="lt1"/>
+      </a:solidFill>
+      <a:ln>
+        <a:solidFill>
+          <a:schemeClr val="dk1">
+            <a:lumMod val="25000"/>
+            <a:lumOff val="75000"/>
+          </a:schemeClr>
+        </a:solidFill>
+      </a:ln>
+    </cs:spPr>
+    <cs:defRPr sz="1197"/>
+    <cs:bodyPr rot="0" spcFirstLastPara="1" vertOverflow="clip" horzOverflow="clip" vert="horz" wrap="square" lIns="36576" tIns="18288" rIns="36576" bIns="18288" anchor="ctr" anchorCtr="1">
+      <a:spAutoFit/>
+    </cs:bodyPr>
+  </cs:dataLabelCallout>
+  <cs:dataPoint>
+    <cs:lnRef idx="0"/>
+    <cs:fillRef idx="0">
+      <cs:styleClr val="auto"/>
+    </cs:fillRef>
+    <cs:effectRef idx="0"/>
+    <cs:fontRef idx="minor">
+      <a:schemeClr val="tx1"/>
+    </cs:fontRef>
+    <cs:spPr>
+      <a:solidFill>
+        <a:schemeClr val="phClr"/>
+      </a:solidFill>
+    </cs:spPr>
+  </cs:dataPoint>
+  <cs:dataPoint3D>
+    <cs:lnRef idx="0"/>
+    <cs:fillRef idx="0">
+      <cs:styleClr val="auto"/>
+    </cs:fillRef>
+    <cs:effectRef idx="0"/>
+    <cs:fontRef idx="minor">
+      <a:schemeClr val="tx1"/>
+    </cs:fontRef>
+    <cs:spPr>
+      <a:solidFill>
+        <a:schemeClr val="phClr"/>
+      </a:solidFill>
+    </cs:spPr>
+  </cs:dataPoint3D>
+  <cs:dataPointLine>
+    <cs:lnRef idx="0">
+      <cs:styleClr val="auto"/>
+    </cs:lnRef>
+    <cs:fillRef idx="0"/>
+    <cs:effectRef idx="0"/>
+    <cs:fontRef idx="minor">
+      <a:schemeClr val="tx1"/>
+    </cs:fontRef>
+    <cs:spPr>
+      <a:ln w="28575" cap="rnd">
+        <a:solidFill>
+          <a:schemeClr val="phClr"/>
+        </a:solidFill>
+        <a:round/>
+      </a:ln>
+    </cs:spPr>
+  </cs:dataPointLine>
+  <cs:dataPointMarker>
+    <cs:lnRef idx="0"/>
+    <cs:fillRef idx="0">
+      <cs:styleClr val="auto"/>
+    </cs:fillRef>
+    <cs:effectRef idx="0"/>
+    <cs:fontRef idx="minor">
+      <a:schemeClr val="tx1"/>
+    </cs:fontRef>
+    <cs:spPr>
+      <a:solidFill>
+        <a:schemeClr val="phClr"/>
+      </a:solidFill>
+      <a:ln w="9525">
+        <a:solidFill>
+          <a:schemeClr val="lt1"/>
+        </a:solidFill>
+      </a:ln>
+    </cs:spPr>
+  </cs:dataPointMarker>
+  <cs:dataPointMarkerLayout symbol="circle" size="5"/>
+  <cs:dataPointWireframe>
+    <cs:lnRef idx="0">
+      <cs:styleClr val="auto"/>
+    </cs:lnRef>
+    <cs:fillRef idx="0"/>
+    <cs:effectRef idx="0"/>
+    <cs:fontRef idx="minor">
+      <a:schemeClr val="tx1"/>
+    </cs:fontRef>
+    <cs:spPr>
+      <a:ln w="28575" cap="rnd">
+        <a:solidFill>
+          <a:schemeClr val="phClr"/>
+        </a:solidFill>
+        <a:round/>
+      </a:ln>
+    </cs:spPr>
+  </cs:dataPointWireframe>
+  <cs:dataTable>
+    <cs:lnRef idx="0"/>
+    <cs:fillRef idx="0"/>
+    <cs:effectRef idx="0"/>
+    <cs:fontRef idx="minor">
+      <a:schemeClr val="tx1">
+        <a:lumMod val="65000"/>
+        <a:lumOff val="35000"/>
+      </a:schemeClr>
+    </cs:fontRef>
+    <cs:spPr>
+      <a:ln w="9525">
+        <a:solidFill>
+          <a:schemeClr val="tx1">
+            <a:lumMod val="15000"/>
+            <a:lumOff val="85000"/>
+          </a:schemeClr>
+        </a:solidFill>
+      </a:ln>
+    </cs:spPr>
+    <cs:defRPr sz="1197"/>
+  </cs:dataTable>
+  <cs:downBar>
+    <cs:lnRef idx="0"/>
+    <cs:fillRef idx="0"/>
+    <cs:effectRef idx="0"/>
+    <cs:fontRef idx="minor">
+      <a:schemeClr val="dk1"/>
+    </cs:fontRef>
+    <cs:spPr>
+      <a:solidFill>
+        <a:schemeClr val="dk1">
+          <a:lumMod val="65000"/>
+          <a:lumOff val="35000"/>
+        </a:schemeClr>
+      </a:solidFill>
+      <a:ln w="9525">
+        <a:solidFill>
+          <a:schemeClr val="tx1">
+            <a:lumMod val="65000"/>
+            <a:lumOff val="35000"/>
+          </a:schemeClr>
+        </a:solidFill>
+      </a:ln>
+    </cs:spPr>
+  </cs:downBar>
+  <cs:dropLine>
+    <cs:lnRef idx="0"/>
+    <cs:fillRef idx="0"/>
+    <cs:effectRef idx="0"/>
+    <cs:fontRef idx="minor">
+      <a:schemeClr val="tx1"/>
+    </cs:fontRef>
+    <cs:spPr>
+      <a:ln w="9525" cap="flat" cmpd="sng" algn="ctr">
+        <a:solidFill>
+          <a:schemeClr val="tx1">
+            <a:lumMod val="35000"/>
+            <a:lumOff val="65000"/>
+          </a:schemeClr>
+        </a:solidFill>
+        <a:round/>
+      </a:ln>
+    </cs:spPr>
+  </cs:dropLine>
+  <cs:errorBar>
+    <cs:lnRef idx="0"/>
+    <cs:fillRef idx="0"/>
+    <cs:effectRef idx="0"/>
+    <cs:fontRef idx="minor">
+      <a:schemeClr val="tx1"/>
+    </cs:fontRef>
+    <cs:spPr>
+      <a:ln w="9525" cap="flat" cmpd="sng" algn="ctr">
+        <a:solidFill>
+          <a:schemeClr val="tx1">
+            <a:lumMod val="65000"/>
+            <a:lumOff val="35000"/>
+          </a:schemeClr>
+        </a:solidFill>
+        <a:round/>
+      </a:ln>
+    </cs:spPr>
+  </cs:errorBar>
+  <cs:floor>
+    <cs:lnRef idx="0"/>
+    <cs:fillRef idx="0"/>
+    <cs:effectRef idx="0"/>
+    <cs:fontRef idx="minor">
+      <a:schemeClr val="tx1"/>
+    </cs:fontRef>
+  </cs:floor>
+  <cs:gridlineMajor>
+    <cs:lnRef idx="0"/>
+    <cs:fillRef idx="0"/>
+    <cs:effectRef idx="0"/>
+    <cs:fontRef idx="minor">
+      <a:schemeClr val="tx1"/>
+    </cs:fontRef>
+    <cs:spPr>
+      <a:ln w="9525" cap="flat" cmpd="sng" algn="ctr">
+        <a:solidFill>
+          <a:schemeClr val="tx1">
+            <a:lumMod val="15000"/>
+            <a:lumOff val="85000"/>
+          </a:schemeClr>
+        </a:solidFill>
+        <a:round/>
+      </a:ln>
+    </cs:spPr>
+  </cs:gridlineMajor>
+  <cs:gridlineMinor>
+    <cs:lnRef idx="0"/>
+    <cs:fillRef idx="0"/>
+    <cs:effectRef idx="0"/>
+    <cs:fontRef idx="minor">
+      <a:schemeClr val="tx1"/>
+    </cs:fontRef>
+    <cs:spPr>
+      <a:ln w="9525" cap="flat" cmpd="sng" algn="ctr">
+        <a:solidFill>
+          <a:schemeClr val="tx1">
+            <a:lumMod val="15000"/>
+            <a:lumOff val="85000"/>
+          </a:schemeClr>
+        </a:solidFill>
+        <a:round/>
+      </a:ln>
+    </cs:spPr>
+  </cs:gridlineMinor>
+  <cs:hiLoLine>
+    <cs:lnRef idx="0"/>
+    <cs:fillRef idx="0"/>
+    <cs:effectRef idx="0"/>
+    <cs:fontRef idx="minor">
+      <a:schemeClr val="tx1"/>
+    </cs:fontRef>
+    <cs:spPr>
+      <a:ln w="9525" cap="flat" cmpd="sng" algn="ctr">
+        <a:solidFill>
+          <a:schemeClr val="tx1">
+            <a:lumMod val="75000"/>
+            <a:lumOff val="25000"/>
+          </a:schemeClr>
+        </a:solidFill>
+        <a:round/>
+      </a:ln>
+    </cs:spPr>
+  </cs:hiLoLine>
+  <cs:leaderLine>
+    <cs:lnRef idx="0"/>
+    <cs:fillRef idx="0"/>
+    <cs:effectRef idx="0"/>
+    <cs:fontRef idx="minor">
+      <a:schemeClr val="tx1"/>
+    </cs:fontRef>
+    <cs:spPr>
+      <a:ln w="9525" cap="flat" cmpd="sng" algn="ctr">
+        <a:solidFill>
+          <a:schemeClr val="tx1">
+            <a:lumMod val="35000"/>
+            <a:lumOff val="65000"/>
+          </a:schemeClr>
+        </a:solidFill>
+        <a:round/>
+      </a:ln>
+    </cs:spPr>
+  </cs:leaderLine>
+  <cs:legend>
+    <cs:lnRef idx="0"/>
+    <cs:fillRef idx="0"/>
+    <cs:effectRef idx="0"/>
+    <cs:fontRef idx="minor">
+      <a:schemeClr val="tx1">
+        <a:lumMod val="65000"/>
+        <a:lumOff val="35000"/>
+      </a:schemeClr>
+    </cs:fontRef>
+    <cs:defRPr sz="1197"/>
+  </cs:legend>
+  <cs:plotArea mods="allowNoFillOverride allowNoLineOverride">
+    <cs:lnRef idx="0"/>
+    <cs:fillRef idx="0"/>
+    <cs:effectRef idx="0"/>
+    <cs:fontRef idx="minor">
+      <a:schemeClr val="tx1"/>
+    </cs:fontRef>
+  </cs:plotArea>
+  <cs:plotArea3D mods="allowNoFillOverride allowNoLineOverride">
+    <cs:lnRef idx="0"/>
+    <cs:fillRef idx="0"/>
+    <cs:effectRef idx="0"/>
+    <cs:fontRef idx="minor">
+      <a:schemeClr val="tx1"/>
+    </cs:fontRef>
+  </cs:plotArea3D>
+  <cs:seriesAxis>
+    <cs:lnRef idx="0"/>
+    <cs:fillRef idx="0"/>
+    <cs:effectRef idx="0"/>
+    <cs:fontRef idx="minor">
+      <a:schemeClr val="tx1">
+        <a:lumMod val="65000"/>
+        <a:lumOff val="35000"/>
+      </a:schemeClr>
+    </cs:fontRef>
+    <cs:spPr>
+      <a:ln w="9525" cap="flat" cmpd="sng" algn="ctr">
+        <a:solidFill>
+          <a:schemeClr val="tx1">
+            <a:lumMod val="15000"/>
+            <a:lumOff val="85000"/>
+          </a:schemeClr>
+        </a:solidFill>
+        <a:round/>
+      </a:ln>
+    </cs:spPr>
+    <cs:defRPr sz="1197"/>
+  </cs:seriesAxis>
+  <cs:seriesLine>
+    <cs:lnRef idx="0"/>
+    <cs:fillRef idx="0"/>
+    <cs:effectRef idx="0"/>
+    <cs:fontRef idx="minor">
+      <a:schemeClr val="tx1"/>
+    </cs:fontRef>
+    <cs:spPr>
+      <a:ln w="9525" cap="flat">
+        <a:solidFill>
+          <a:srgbClr val="D9D9D9"/>
+        </a:solidFill>
+        <a:round/>
+      </a:ln>
+    </cs:spPr>
+  </cs:seriesLine>
+  <cs:title>
+    <cs:lnRef idx="0"/>
+    <cs:fillRef idx="0"/>
+    <cs:effectRef idx="0"/>
+    <cs:fontRef idx="minor">
+      <a:schemeClr val="tx1">
+        <a:lumMod val="65000"/>
+        <a:lumOff val="35000"/>
+      </a:schemeClr>
+    </cs:fontRef>
+    <cs:defRPr sz="1862"/>
+  </cs:title>
+  <cs:trendline>
+    <cs:lnRef idx="0">
+      <cs:styleClr val="auto"/>
+    </cs:lnRef>
+    <cs:fillRef idx="0"/>
+    <cs:effectRef idx="0"/>
+    <cs:fontRef idx="minor">
+      <a:schemeClr val="tx1"/>
+    </cs:fontRef>
+    <cs:spPr>
+      <a:ln w="19050" cap="rnd">
+        <a:solidFill>
+          <a:schemeClr val="phClr"/>
+        </a:solidFill>
+        <a:prstDash val="sysDash"/>
+      </a:ln>
+    </cs:spPr>
+  </cs:trendline>
+  <cs:trendlineLabel>
+    <cs:lnRef idx="0"/>
+    <cs:fillRef idx="0"/>
+    <cs:effectRef idx="0"/>
+    <cs:fontRef idx="minor">
+      <a:schemeClr val="tx1">
+        <a:lumMod val="65000"/>
+        <a:lumOff val="35000"/>
+      </a:schemeClr>
+    </cs:fontRef>
+    <cs:defRPr sz="1197"/>
+  </cs:trendlineLabel>
+  <cs:upBar>
+    <cs:lnRef idx="0"/>
+    <cs:fillRef idx="0"/>
+    <cs:effectRef idx="0"/>
+    <cs:fontRef idx="minor">
+      <a:schemeClr val="dk1"/>
+    </cs:fontRef>
+    <cs:spPr>
+      <a:solidFill>
+        <a:schemeClr val="lt1"/>
+      </a:solidFill>
+      <a:ln w="9525">
+        <a:solidFill>
+          <a:schemeClr val="tx1">
+            <a:lumMod val="15000"/>
+            <a:lumOff val="85000"/>
+          </a:schemeClr>
+        </a:solidFill>
+      </a:ln>
+    </cs:spPr>
+  </cs:upBar>
+  <cs:valueAxis>
+    <cs:lnRef idx="0"/>
+    <cs:fillRef idx="0"/>
+    <cs:effectRef idx="0"/>
+    <cs:fontRef idx="minor">
+      <a:schemeClr val="tx1">
+        <a:lumMod val="65000"/>
+        <a:lumOff val="35000"/>
+      </a:schemeClr>
+    </cs:fontRef>
+    <cs:defRPr sz="1197"/>
+  </cs:valueAxis>
+  <cs:wall>
+    <cs:lnRef idx="0"/>
+    <cs:fillRef idx="0"/>
+    <cs:effectRef idx="0"/>
+    <cs:fontRef idx="minor">
+      <a:schemeClr val="tx1"/>
+    </cs:fontRef>
+  </cs:wall>
+</cs:chartStyle>
+</file>
+
+<file path=ppt/charts/style12.xml><?xml version="1.0" encoding="utf-8"?>
+<cs:chartStyle xmlns:cs="http://schemas.microsoft.com/office/drawing/2012/chartStyle" xmlns:a="http://schemas.openxmlformats.org/drawingml/2006/main" id="419">
+  <cs:axisTitle>
+    <cs:lnRef idx="0"/>
+    <cs:fillRef idx="0"/>
+    <cs:effectRef idx="0"/>
+    <cs:fontRef idx="minor">
+      <a:schemeClr val="tx1">
+        <a:lumMod val="65000"/>
+        <a:lumOff val="35000"/>
+      </a:schemeClr>
+    </cs:fontRef>
+    <cs:defRPr sz="1197"/>
+  </cs:axisTitle>
+  <cs:categoryAxis>
+    <cs:lnRef idx="0"/>
+    <cs:fillRef idx="0"/>
+    <cs:effectRef idx="0"/>
+    <cs:fontRef idx="minor">
+      <a:schemeClr val="tx1">
+        <a:lumMod val="65000"/>
+        <a:lumOff val="35000"/>
+      </a:schemeClr>
+    </cs:fontRef>
+    <cs:spPr>
+      <a:ln w="9525" cap="flat" cmpd="sng" algn="ctr">
+        <a:solidFill>
+          <a:schemeClr val="tx1">
+            <a:lumMod val="15000"/>
+            <a:lumOff val="85000"/>
+          </a:schemeClr>
+        </a:solidFill>
+        <a:round/>
+      </a:ln>
+    </cs:spPr>
+    <cs:defRPr sz="1197"/>
+  </cs:categoryAxis>
+  <cs:chartArea mods="allowNoFillOverride allowNoLineOverride">
+    <cs:lnRef idx="0"/>
+    <cs:fillRef idx="0"/>
+    <cs:effectRef idx="0"/>
+    <cs:fontRef idx="minor">
+      <a:schemeClr val="tx1"/>
+    </cs:fontRef>
+    <cs:spPr>
+      <a:solidFill>
+        <a:schemeClr val="bg1"/>
+      </a:solidFill>
+      <a:ln w="9525" cap="flat" cmpd="sng" algn="ctr">
+        <a:solidFill>
+          <a:schemeClr val="tx1">
+            <a:lumMod val="15000"/>
+            <a:lumOff val="85000"/>
+          </a:schemeClr>
+        </a:solidFill>
+        <a:round/>
+      </a:ln>
+    </cs:spPr>
+    <cs:defRPr sz="1330"/>
+  </cs:chartArea>
+  <cs:dataLabel>
+    <cs:lnRef idx="0"/>
+    <cs:fillRef idx="0"/>
+    <cs:effectRef idx="0"/>
+    <cs:fontRef idx="minor">
+      <a:schemeClr val="tx1">
+        <a:lumMod val="65000"/>
+        <a:lumOff val="35000"/>
+      </a:schemeClr>
+    </cs:fontRef>
+    <cs:defRPr sz="1197"/>
+  </cs:dataLabel>
+  <cs:dataLabelCallout>
+    <cs:lnRef idx="0"/>
+    <cs:fillRef idx="0"/>
+    <cs:effectRef idx="0"/>
+    <cs:fontRef idx="minor">
+      <a:schemeClr val="dk1">
+        <a:lumMod val="65000"/>
+        <a:lumOff val="35000"/>
+      </a:schemeClr>
+    </cs:fontRef>
+    <cs:spPr>
+      <a:solidFill>
+        <a:schemeClr val="lt1"/>
+      </a:solidFill>
+      <a:ln>
+        <a:solidFill>
+          <a:schemeClr val="dk1">
+            <a:lumMod val="25000"/>
+            <a:lumOff val="75000"/>
+          </a:schemeClr>
+        </a:solidFill>
+      </a:ln>
+    </cs:spPr>
+    <cs:defRPr sz="1197"/>
+    <cs:bodyPr rot="0" spcFirstLastPara="1" vertOverflow="clip" horzOverflow="clip" vert="horz" wrap="square" lIns="36576" tIns="18288" rIns="36576" bIns="18288" anchor="ctr" anchorCtr="1">
+      <a:spAutoFit/>
+    </cs:bodyPr>
+  </cs:dataLabelCallout>
+  <cs:dataPoint>
+    <cs:lnRef idx="0"/>
+    <cs:fillRef idx="0">
+      <cs:styleClr val="auto"/>
+    </cs:fillRef>
+    <cs:effectRef idx="0"/>
+    <cs:fontRef idx="minor">
+      <a:schemeClr val="tx1"/>
+    </cs:fontRef>
+    <cs:spPr>
+      <a:solidFill>
+        <a:schemeClr val="phClr"/>
+      </a:solidFill>
+    </cs:spPr>
+  </cs:dataPoint>
+  <cs:dataPoint3D>
+    <cs:lnRef idx="0"/>
+    <cs:fillRef idx="0">
+      <cs:styleClr val="auto"/>
+    </cs:fillRef>
+    <cs:effectRef idx="0"/>
+    <cs:fontRef idx="minor">
+      <a:schemeClr val="tx1"/>
+    </cs:fontRef>
+    <cs:spPr>
+      <a:solidFill>
+        <a:schemeClr val="phClr"/>
+      </a:solidFill>
+    </cs:spPr>
+  </cs:dataPoint3D>
+  <cs:dataPointLine>
+    <cs:lnRef idx="0">
+      <cs:styleClr val="auto"/>
+    </cs:lnRef>
+    <cs:fillRef idx="0"/>
+    <cs:effectRef idx="0"/>
+    <cs:fontRef idx="minor">
+      <a:schemeClr val="tx1"/>
+    </cs:fontRef>
+    <cs:spPr>
+      <a:ln w="28575" cap="rnd">
+        <a:solidFill>
+          <a:schemeClr val="phClr"/>
+        </a:solidFill>
+        <a:round/>
+      </a:ln>
+    </cs:spPr>
+  </cs:dataPointLine>
+  <cs:dataPointMarker>
+    <cs:lnRef idx="0"/>
+    <cs:fillRef idx="0">
+      <cs:styleClr val="auto"/>
+    </cs:fillRef>
+    <cs:effectRef idx="0"/>
+    <cs:fontRef idx="minor">
+      <a:schemeClr val="tx1"/>
+    </cs:fontRef>
+    <cs:spPr>
+      <a:solidFill>
+        <a:schemeClr val="phClr"/>
+      </a:solidFill>
+      <a:ln w="9525">
+        <a:solidFill>
+          <a:schemeClr val="lt1"/>
+        </a:solidFill>
+      </a:ln>
+    </cs:spPr>
+  </cs:dataPointMarker>
+  <cs:dataPointMarkerLayout symbol="circle" size="5"/>
+  <cs:dataPointWireframe>
+    <cs:lnRef idx="0">
+      <cs:styleClr val="auto"/>
+    </cs:lnRef>
+    <cs:fillRef idx="0"/>
+    <cs:effectRef idx="0"/>
+    <cs:fontRef idx="minor">
+      <a:schemeClr val="tx1"/>
+    </cs:fontRef>
+    <cs:spPr>
+      <a:ln w="28575" cap="rnd">
+        <a:solidFill>
+          <a:schemeClr val="phClr"/>
+        </a:solidFill>
+        <a:round/>
+      </a:ln>
+    </cs:spPr>
+  </cs:dataPointWireframe>
+  <cs:dataTable>
+    <cs:lnRef idx="0"/>
+    <cs:fillRef idx="0"/>
+    <cs:effectRef idx="0"/>
+    <cs:fontRef idx="minor">
+      <a:schemeClr val="tx1">
+        <a:lumMod val="65000"/>
+        <a:lumOff val="35000"/>
+      </a:schemeClr>
+    </cs:fontRef>
+    <cs:spPr>
+      <a:ln w="9525">
+        <a:solidFill>
+          <a:schemeClr val="tx1">
+            <a:lumMod val="15000"/>
+            <a:lumOff val="85000"/>
+          </a:schemeClr>
+        </a:solidFill>
+      </a:ln>
+    </cs:spPr>
+    <cs:defRPr sz="1197"/>
+  </cs:dataTable>
+  <cs:downBar>
+    <cs:lnRef idx="0"/>
+    <cs:fillRef idx="0"/>
+    <cs:effectRef idx="0"/>
+    <cs:fontRef idx="minor">
+      <a:schemeClr val="dk1"/>
+    </cs:fontRef>
+    <cs:spPr>
+      <a:solidFill>
+        <a:schemeClr val="dk1">
+          <a:lumMod val="65000"/>
+          <a:lumOff val="35000"/>
+        </a:schemeClr>
+      </a:solidFill>
+      <a:ln w="9525">
+        <a:solidFill>
+          <a:schemeClr val="tx1">
+            <a:lumMod val="65000"/>
+            <a:lumOff val="35000"/>
+          </a:schemeClr>
+        </a:solidFill>
+      </a:ln>
+    </cs:spPr>
+  </cs:downBar>
+  <cs:dropLine>
+    <cs:lnRef idx="0"/>
+    <cs:fillRef idx="0"/>
+    <cs:effectRef idx="0"/>
+    <cs:fontRef idx="minor">
+      <a:schemeClr val="tx1"/>
+    </cs:fontRef>
+    <cs:spPr>
+      <a:ln w="9525" cap="flat" cmpd="sng" algn="ctr">
+        <a:solidFill>
+          <a:schemeClr val="tx1">
+            <a:lumMod val="35000"/>
+            <a:lumOff val="65000"/>
+          </a:schemeClr>
+        </a:solidFill>
+        <a:round/>
+      </a:ln>
+    </cs:spPr>
+  </cs:dropLine>
+  <cs:errorBar>
+    <cs:lnRef idx="0"/>
+    <cs:fillRef idx="0"/>
+    <cs:effectRef idx="0"/>
+    <cs:fontRef idx="minor">
+      <a:schemeClr val="tx1"/>
+    </cs:fontRef>
+    <cs:spPr>
+      <a:ln w="9525" cap="flat" cmpd="sng" algn="ctr">
+        <a:solidFill>
+          <a:schemeClr val="tx1">
+            <a:lumMod val="65000"/>
+            <a:lumOff val="35000"/>
+          </a:schemeClr>
+        </a:solidFill>
+        <a:round/>
+      </a:ln>
+    </cs:spPr>
+  </cs:errorBar>
+  <cs:floor>
+    <cs:lnRef idx="0"/>
+    <cs:fillRef idx="0"/>
+    <cs:effectRef idx="0"/>
+    <cs:fontRef idx="minor">
+      <a:schemeClr val="tx1"/>
+    </cs:fontRef>
+  </cs:floor>
+  <cs:gridlineMajor>
+    <cs:lnRef idx="0"/>
+    <cs:fillRef idx="0"/>
+    <cs:effectRef idx="0"/>
+    <cs:fontRef idx="minor">
+      <a:schemeClr val="tx1"/>
+    </cs:fontRef>
+    <cs:spPr>
+      <a:ln w="9525" cap="flat" cmpd="sng" algn="ctr">
+        <a:solidFill>
+          <a:schemeClr val="tx1">
+            <a:lumMod val="15000"/>
+            <a:lumOff val="85000"/>
+          </a:schemeClr>
+        </a:solidFill>
+        <a:round/>
+      </a:ln>
+    </cs:spPr>
+  </cs:gridlineMajor>
+  <cs:gridlineMinor>
+    <cs:lnRef idx="0"/>
+    <cs:fillRef idx="0"/>
+    <cs:effectRef idx="0"/>
+    <cs:fontRef idx="minor">
+      <a:schemeClr val="tx1"/>
+    </cs:fontRef>
+    <cs:spPr>
+      <a:ln w="9525" cap="flat" cmpd="sng" algn="ctr">
+        <a:solidFill>
+          <a:schemeClr val="tx1">
+            <a:lumMod val="15000"/>
+            <a:lumOff val="85000"/>
+          </a:schemeClr>
+        </a:solidFill>
+        <a:round/>
+      </a:ln>
+    </cs:spPr>
+  </cs:gridlineMinor>
+  <cs:hiLoLine>
+    <cs:lnRef idx="0"/>
+    <cs:fillRef idx="0"/>
+    <cs:effectRef idx="0"/>
+    <cs:fontRef idx="minor">
+      <a:schemeClr val="tx1"/>
+    </cs:fontRef>
+    <cs:spPr>
+      <a:ln w="9525" cap="flat" cmpd="sng" algn="ctr">
+        <a:solidFill>
+          <a:schemeClr val="tx1">
+            <a:lumMod val="75000"/>
+            <a:lumOff val="25000"/>
+          </a:schemeClr>
+        </a:solidFill>
+        <a:round/>
+      </a:ln>
+    </cs:spPr>
+  </cs:hiLoLine>
+  <cs:leaderLine>
+    <cs:lnRef idx="0"/>
+    <cs:fillRef idx="0"/>
+    <cs:effectRef idx="0"/>
+    <cs:fontRef idx="minor">
+      <a:schemeClr val="tx1"/>
+    </cs:fontRef>
+    <cs:spPr>
+      <a:ln w="9525" cap="flat" cmpd="sng" algn="ctr">
+        <a:solidFill>
+          <a:schemeClr val="tx1">
+            <a:lumMod val="35000"/>
+            <a:lumOff val="65000"/>
+          </a:schemeClr>
+        </a:solidFill>
+        <a:round/>
+      </a:ln>
+    </cs:spPr>
+  </cs:leaderLine>
+  <cs:legend>
+    <cs:lnRef idx="0"/>
+    <cs:fillRef idx="0"/>
+    <cs:effectRef idx="0"/>
+    <cs:fontRef idx="minor">
+      <a:schemeClr val="tx1">
+        <a:lumMod val="65000"/>
+        <a:lumOff val="35000"/>
+      </a:schemeClr>
+    </cs:fontRef>
+    <cs:defRPr sz="1197"/>
+  </cs:legend>
+  <cs:plotArea mods="allowNoFillOverride allowNoLineOverride">
+    <cs:lnRef idx="0"/>
+    <cs:fillRef idx="0"/>
+    <cs:effectRef idx="0"/>
+    <cs:fontRef idx="minor">
+      <a:schemeClr val="tx1"/>
+    </cs:fontRef>
+  </cs:plotArea>
+  <cs:plotArea3D mods="allowNoFillOverride allowNoLineOverride">
+    <cs:lnRef idx="0"/>
+    <cs:fillRef idx="0"/>
+    <cs:effectRef idx="0"/>
+    <cs:fontRef idx="minor">
+      <a:schemeClr val="tx1"/>
+    </cs:fontRef>
+  </cs:plotArea3D>
+  <cs:seriesAxis>
+    <cs:lnRef idx="0"/>
+    <cs:fillRef idx="0"/>
+    <cs:effectRef idx="0"/>
+    <cs:fontRef idx="minor">
+      <a:schemeClr val="tx1">
+        <a:lumMod val="65000"/>
+        <a:lumOff val="35000"/>
+      </a:schemeClr>
+    </cs:fontRef>
+    <cs:spPr>
+      <a:ln w="9525" cap="flat" cmpd="sng" algn="ctr">
+        <a:solidFill>
+          <a:schemeClr val="tx1">
+            <a:lumMod val="15000"/>
+            <a:lumOff val="85000"/>
+          </a:schemeClr>
+        </a:solidFill>
+        <a:round/>
+      </a:ln>
+    </cs:spPr>
+    <cs:defRPr sz="1197"/>
+  </cs:seriesAxis>
+  <cs:seriesLine>
+    <cs:lnRef idx="0"/>
+    <cs:fillRef idx="0"/>
+    <cs:effectRef idx="0"/>
+    <cs:fontRef idx="minor">
+      <a:schemeClr val="tx1"/>
+    </cs:fontRef>
+    <cs:spPr>
+      <a:ln w="9525" cap="flat">
+        <a:solidFill>
+          <a:srgbClr val="D9D9D9"/>
+        </a:solidFill>
+        <a:round/>
+      </a:ln>
+    </cs:spPr>
+  </cs:seriesLine>
+  <cs:title>
+    <cs:lnRef idx="0"/>
+    <cs:fillRef idx="0"/>
+    <cs:effectRef idx="0"/>
+    <cs:fontRef idx="minor">
+      <a:schemeClr val="tx1">
+        <a:lumMod val="65000"/>
+        <a:lumOff val="35000"/>
+      </a:schemeClr>
+    </cs:fontRef>
+    <cs:defRPr sz="1862"/>
+  </cs:title>
+  <cs:trendline>
+    <cs:lnRef idx="0">
+      <cs:styleClr val="auto"/>
+    </cs:lnRef>
+    <cs:fillRef idx="0"/>
+    <cs:effectRef idx="0"/>
+    <cs:fontRef idx="minor">
+      <a:schemeClr val="tx1"/>
+    </cs:fontRef>
+    <cs:spPr>
+      <a:ln w="19050" cap="rnd">
+        <a:solidFill>
+          <a:schemeClr val="phClr"/>
+        </a:solidFill>
+        <a:prstDash val="sysDash"/>
+      </a:ln>
+    </cs:spPr>
+  </cs:trendline>
+  <cs:trendlineLabel>
+    <cs:lnRef idx="0"/>
+    <cs:fillRef idx="0"/>
+    <cs:effectRef idx="0"/>
+    <cs:fontRef idx="minor">
+      <a:schemeClr val="tx1">
+        <a:lumMod val="65000"/>
+        <a:lumOff val="35000"/>
+      </a:schemeClr>
+    </cs:fontRef>
+    <cs:defRPr sz="1197"/>
+  </cs:trendlineLabel>
+  <cs:upBar>
+    <cs:lnRef idx="0"/>
+    <cs:fillRef idx="0"/>
+    <cs:effectRef idx="0"/>
+    <cs:fontRef idx="minor">
+      <a:schemeClr val="dk1"/>
+    </cs:fontRef>
+    <cs:spPr>
+      <a:solidFill>
+        <a:schemeClr val="lt1"/>
+      </a:solidFill>
+      <a:ln w="9525">
+        <a:solidFill>
+          <a:schemeClr val="tx1">
+            <a:lumMod val="15000"/>
+            <a:lumOff val="85000"/>
+          </a:schemeClr>
+        </a:solidFill>
+      </a:ln>
+    </cs:spPr>
+  </cs:upBar>
+  <cs:valueAxis>
+    <cs:lnRef idx="0"/>
+    <cs:fillRef idx="0"/>
+    <cs:effectRef idx="0"/>
+    <cs:fontRef idx="minor">
+      <a:schemeClr val="tx1">
+        <a:lumMod val="65000"/>
+        <a:lumOff val="35000"/>
+      </a:schemeClr>
+    </cs:fontRef>
+    <cs:defRPr sz="1197"/>
+  </cs:valueAxis>
+  <cs:wall>
+    <cs:lnRef idx="0"/>
+    <cs:fillRef idx="0"/>
+    <cs:effectRef idx="0"/>
+    <cs:fontRef idx="minor">
+      <a:schemeClr val="tx1"/>
+    </cs:fontRef>
+  </cs:wall>
+</cs:chartStyle>
+</file>
+
+<file path=ppt/charts/style13.xml><?xml version="1.0" encoding="utf-8"?>
+<cs:chartStyle xmlns:cs="http://schemas.microsoft.com/office/drawing/2012/chartStyle" xmlns:a="http://schemas.openxmlformats.org/drawingml/2006/main" id="419">
+  <cs:axisTitle>
+    <cs:lnRef idx="0"/>
+    <cs:fillRef idx="0"/>
+    <cs:effectRef idx="0"/>
+    <cs:fontRef idx="minor">
+      <a:schemeClr val="tx1">
+        <a:lumMod val="65000"/>
+        <a:lumOff val="35000"/>
+      </a:schemeClr>
+    </cs:fontRef>
+    <cs:defRPr sz="1197"/>
+  </cs:axisTitle>
+  <cs:categoryAxis>
+    <cs:lnRef idx="0"/>
+    <cs:fillRef idx="0"/>
+    <cs:effectRef idx="0"/>
+    <cs:fontRef idx="minor">
+      <a:schemeClr val="tx1">
+        <a:lumMod val="65000"/>
+        <a:lumOff val="35000"/>
+      </a:schemeClr>
+    </cs:fontRef>
+    <cs:spPr>
+      <a:ln w="9525" cap="flat" cmpd="sng" algn="ctr">
+        <a:solidFill>
+          <a:schemeClr val="tx1">
+            <a:lumMod val="15000"/>
+            <a:lumOff val="85000"/>
+          </a:schemeClr>
+        </a:solidFill>
+        <a:round/>
+      </a:ln>
+    </cs:spPr>
+    <cs:defRPr sz="1197"/>
+  </cs:categoryAxis>
+  <cs:chartArea mods="allowNoFillOverride allowNoLineOverride">
+    <cs:lnRef idx="0"/>
+    <cs:fillRef idx="0"/>
+    <cs:effectRef idx="0"/>
+    <cs:fontRef idx="minor">
+      <a:schemeClr val="tx1"/>
+    </cs:fontRef>
+    <cs:spPr>
+      <a:solidFill>
+        <a:schemeClr val="bg1"/>
+      </a:solidFill>
+      <a:ln w="9525" cap="flat" cmpd="sng" algn="ctr">
+        <a:solidFill>
+          <a:schemeClr val="tx1">
+            <a:lumMod val="15000"/>
+            <a:lumOff val="85000"/>
+          </a:schemeClr>
+        </a:solidFill>
+        <a:round/>
+      </a:ln>
+    </cs:spPr>
+    <cs:defRPr sz="1330"/>
+  </cs:chartArea>
+  <cs:dataLabel>
+    <cs:lnRef idx="0"/>
+    <cs:fillRef idx="0"/>
+    <cs:effectRef idx="0"/>
+    <cs:fontRef idx="minor">
+      <a:schemeClr val="tx1">
+        <a:lumMod val="65000"/>
+        <a:lumOff val="35000"/>
+      </a:schemeClr>
+    </cs:fontRef>
+    <cs:defRPr sz="1197"/>
+  </cs:dataLabel>
+  <cs:dataLabelCallout>
+    <cs:lnRef idx="0"/>
+    <cs:fillRef idx="0"/>
+    <cs:effectRef idx="0"/>
+    <cs:fontRef idx="minor">
+      <a:schemeClr val="dk1">
+        <a:lumMod val="65000"/>
+        <a:lumOff val="35000"/>
+      </a:schemeClr>
+    </cs:fontRef>
+    <cs:spPr>
+      <a:solidFill>
+        <a:schemeClr val="lt1"/>
+      </a:solidFill>
+      <a:ln>
+        <a:solidFill>
+          <a:schemeClr val="dk1">
+            <a:lumMod val="25000"/>
+            <a:lumOff val="75000"/>
+          </a:schemeClr>
+        </a:solidFill>
+      </a:ln>
+    </cs:spPr>
+    <cs:defRPr sz="1197"/>
+    <cs:bodyPr rot="0" spcFirstLastPara="1" vertOverflow="clip" horzOverflow="clip" vert="horz" wrap="square" lIns="36576" tIns="18288" rIns="36576" bIns="18288" anchor="ctr" anchorCtr="1">
+      <a:spAutoFit/>
+    </cs:bodyPr>
+  </cs:dataLabelCallout>
+  <cs:dataPoint>
+    <cs:lnRef idx="0"/>
+    <cs:fillRef idx="0">
+      <cs:styleClr val="auto"/>
+    </cs:fillRef>
+    <cs:effectRef idx="0"/>
+    <cs:fontRef idx="minor">
+      <a:schemeClr val="tx1"/>
+    </cs:fontRef>
+    <cs:spPr>
+      <a:solidFill>
+        <a:schemeClr val="phClr"/>
+      </a:solidFill>
+    </cs:spPr>
+  </cs:dataPoint>
+  <cs:dataPoint3D>
+    <cs:lnRef idx="0"/>
+    <cs:fillRef idx="0">
+      <cs:styleClr val="auto"/>
+    </cs:fillRef>
+    <cs:effectRef idx="0"/>
+    <cs:fontRef idx="minor">
+      <a:schemeClr val="tx1"/>
+    </cs:fontRef>
+    <cs:spPr>
+      <a:solidFill>
+        <a:schemeClr val="phClr"/>
+      </a:solidFill>
+    </cs:spPr>
+  </cs:dataPoint3D>
+  <cs:dataPointLine>
+    <cs:lnRef idx="0">
+      <cs:styleClr val="auto"/>
+    </cs:lnRef>
+    <cs:fillRef idx="0"/>
+    <cs:effectRef idx="0"/>
+    <cs:fontRef idx="minor">
+      <a:schemeClr val="tx1"/>
+    </cs:fontRef>
+    <cs:spPr>
+      <a:ln w="28575" cap="rnd">
+        <a:solidFill>
+          <a:schemeClr val="phClr"/>
+        </a:solidFill>
+        <a:round/>
+      </a:ln>
+    </cs:spPr>
+  </cs:dataPointLine>
+  <cs:dataPointMarker>
+    <cs:lnRef idx="0"/>
+    <cs:fillRef idx="0">
+      <cs:styleClr val="auto"/>
+    </cs:fillRef>
+    <cs:effectRef idx="0"/>
+    <cs:fontRef idx="minor">
+      <a:schemeClr val="tx1"/>
+    </cs:fontRef>
+    <cs:spPr>
+      <a:solidFill>
+        <a:schemeClr val="phClr"/>
+      </a:solidFill>
+      <a:ln w="9525">
+        <a:solidFill>
+          <a:schemeClr val="lt1"/>
+        </a:solidFill>
+      </a:ln>
+    </cs:spPr>
+  </cs:dataPointMarker>
+  <cs:dataPointMarkerLayout symbol="circle" size="5"/>
+  <cs:dataPointWireframe>
+    <cs:lnRef idx="0">
+      <cs:styleClr val="auto"/>
+    </cs:lnRef>
+    <cs:fillRef idx="0"/>
+    <cs:effectRef idx="0"/>
+    <cs:fontRef idx="minor">
+      <a:schemeClr val="tx1"/>
+    </cs:fontRef>
+    <cs:spPr>
+      <a:ln w="28575" cap="rnd">
+        <a:solidFill>
+          <a:schemeClr val="phClr"/>
+        </a:solidFill>
+        <a:round/>
+      </a:ln>
+    </cs:spPr>
+  </cs:dataPointWireframe>
+  <cs:dataTable>
+    <cs:lnRef idx="0"/>
+    <cs:fillRef idx="0"/>
+    <cs:effectRef idx="0"/>
+    <cs:fontRef idx="minor">
+      <a:schemeClr val="tx1">
+        <a:lumMod val="65000"/>
+        <a:lumOff val="35000"/>
+      </a:schemeClr>
+    </cs:fontRef>
+    <cs:spPr>
+      <a:ln w="9525">
+        <a:solidFill>
+          <a:schemeClr val="tx1">
+            <a:lumMod val="15000"/>
+            <a:lumOff val="85000"/>
+          </a:schemeClr>
+        </a:solidFill>
+      </a:ln>
+    </cs:spPr>
+    <cs:defRPr sz="1197"/>
+  </cs:dataTable>
+  <cs:downBar>
+    <cs:lnRef idx="0"/>
+    <cs:fillRef idx="0"/>
+    <cs:effectRef idx="0"/>
+    <cs:fontRef idx="minor">
+      <a:schemeClr val="dk1"/>
+    </cs:fontRef>
+    <cs:spPr>
+      <a:solidFill>
+        <a:schemeClr val="dk1">
+          <a:lumMod val="65000"/>
+          <a:lumOff val="35000"/>
+        </a:schemeClr>
+      </a:solidFill>
+      <a:ln w="9525">
+        <a:solidFill>
+          <a:schemeClr val="tx1">
+            <a:lumMod val="65000"/>
+            <a:lumOff val="35000"/>
+          </a:schemeClr>
+        </a:solidFill>
+      </a:ln>
+    </cs:spPr>
+  </cs:downBar>
+  <cs:dropLine>
+    <cs:lnRef idx="0"/>
+    <cs:fillRef idx="0"/>
+    <cs:effectRef idx="0"/>
+    <cs:fontRef idx="minor">
+      <a:schemeClr val="tx1"/>
+    </cs:fontRef>
+    <cs:spPr>
+      <a:ln w="9525" cap="flat" cmpd="sng" algn="ctr">
+        <a:solidFill>
+          <a:schemeClr val="tx1">
+            <a:lumMod val="35000"/>
+            <a:lumOff val="65000"/>
+          </a:schemeClr>
+        </a:solidFill>
+        <a:round/>
+      </a:ln>
+    </cs:spPr>
+  </cs:dropLine>
+  <cs:errorBar>
+    <cs:lnRef idx="0"/>
+    <cs:fillRef idx="0"/>
+    <cs:effectRef idx="0"/>
+    <cs:fontRef idx="minor">
+      <a:schemeClr val="tx1"/>
+    </cs:fontRef>
+    <cs:spPr>
+      <a:ln w="9525" cap="flat" cmpd="sng" algn="ctr">
+        <a:solidFill>
+          <a:schemeClr val="tx1">
+            <a:lumMod val="65000"/>
+            <a:lumOff val="35000"/>
+          </a:schemeClr>
+        </a:solidFill>
+        <a:round/>
+      </a:ln>
+    </cs:spPr>
+  </cs:errorBar>
+  <cs:floor>
+    <cs:lnRef idx="0"/>
+    <cs:fillRef idx="0"/>
+    <cs:effectRef idx="0"/>
+    <cs:fontRef idx="minor">
+      <a:schemeClr val="tx1"/>
+    </cs:fontRef>
+  </cs:floor>
+  <cs:gridlineMajor>
+    <cs:lnRef idx="0"/>
+    <cs:fillRef idx="0"/>
+    <cs:effectRef idx="0"/>
+    <cs:fontRef idx="minor">
+      <a:schemeClr val="tx1"/>
+    </cs:fontRef>
+    <cs:spPr>
+      <a:ln w="9525" cap="flat" cmpd="sng" algn="ctr">
+        <a:solidFill>
+          <a:schemeClr val="tx1">
+            <a:lumMod val="15000"/>
+            <a:lumOff val="85000"/>
+          </a:schemeClr>
+        </a:solidFill>
+        <a:round/>
+      </a:ln>
+    </cs:spPr>
+  </cs:gridlineMajor>
+  <cs:gridlineMinor>
+    <cs:lnRef idx="0"/>
+    <cs:fillRef idx="0"/>
+    <cs:effectRef idx="0"/>
+    <cs:fontRef idx="minor">
+      <a:schemeClr val="tx1"/>
+    </cs:fontRef>
+    <cs:spPr>
+      <a:ln w="9525" cap="flat" cmpd="sng" algn="ctr">
+        <a:solidFill>
+          <a:schemeClr val="tx1">
+            <a:lumMod val="15000"/>
+            <a:lumOff val="85000"/>
+          </a:schemeClr>
+        </a:solidFill>
+        <a:round/>
+      </a:ln>
+    </cs:spPr>
+  </cs:gridlineMinor>
+  <cs:hiLoLine>
+    <cs:lnRef idx="0"/>
+    <cs:fillRef idx="0"/>
+    <cs:effectRef idx="0"/>
+    <cs:fontRef idx="minor">
+      <a:schemeClr val="tx1"/>
+    </cs:fontRef>
+    <cs:spPr>
+      <a:ln w="9525" cap="flat" cmpd="sng" algn="ctr">
+        <a:solidFill>
+          <a:schemeClr val="tx1">
+            <a:lumMod val="75000"/>
+            <a:lumOff val="25000"/>
+          </a:schemeClr>
+        </a:solidFill>
+        <a:round/>
+      </a:ln>
+    </cs:spPr>
+  </cs:hiLoLine>
+  <cs:leaderLine>
+    <cs:lnRef idx="0"/>
+    <cs:fillRef idx="0"/>
+    <cs:effectRef idx="0"/>
+    <cs:fontRef idx="minor">
+      <a:schemeClr val="tx1"/>
+    </cs:fontRef>
+    <cs:spPr>
+      <a:ln w="9525" cap="flat" cmpd="sng" algn="ctr">
+        <a:solidFill>
+          <a:schemeClr val="tx1">
+            <a:lumMod val="35000"/>
+            <a:lumOff val="65000"/>
+          </a:schemeClr>
+        </a:solidFill>
+        <a:round/>
+      </a:ln>
+    </cs:spPr>
+  </cs:leaderLine>
+  <cs:legend>
+    <cs:lnRef idx="0"/>
+    <cs:fillRef idx="0"/>
+    <cs:effectRef idx="0"/>
+    <cs:fontRef idx="minor">
+      <a:schemeClr val="tx1">
+        <a:lumMod val="65000"/>
+        <a:lumOff val="35000"/>
+      </a:schemeClr>
+    </cs:fontRef>
+    <cs:defRPr sz="1197"/>
+  </cs:legend>
+  <cs:plotArea mods="allowNoFillOverride allowNoLineOverride">
+    <cs:lnRef idx="0"/>
+    <cs:fillRef idx="0"/>
+    <cs:effectRef idx="0"/>
+    <cs:fontRef idx="minor">
+      <a:schemeClr val="tx1"/>
+    </cs:fontRef>
+  </cs:plotArea>
+  <cs:plotArea3D mods="allowNoFillOverride allowNoLineOverride">
+    <cs:lnRef idx="0"/>
+    <cs:fillRef idx="0"/>
+    <cs:effectRef idx="0"/>
+    <cs:fontRef idx="minor">
+      <a:schemeClr val="tx1"/>
+    </cs:fontRef>
+  </cs:plotArea3D>
+  <cs:seriesAxis>
+    <cs:lnRef idx="0"/>
+    <cs:fillRef idx="0"/>
+    <cs:effectRef idx="0"/>
+    <cs:fontRef idx="minor">
+      <a:schemeClr val="tx1">
+        <a:lumMod val="65000"/>
+        <a:lumOff val="35000"/>
+      </a:schemeClr>
+    </cs:fontRef>
+    <cs:spPr>
+      <a:ln w="9525" cap="flat" cmpd="sng" algn="ctr">
+        <a:solidFill>
+          <a:schemeClr val="tx1">
+            <a:lumMod val="15000"/>
+            <a:lumOff val="85000"/>
+          </a:schemeClr>
+        </a:solidFill>
+        <a:round/>
+      </a:ln>
+    </cs:spPr>
+    <cs:defRPr sz="1197"/>
+  </cs:seriesAxis>
+  <cs:seriesLine>
+    <cs:lnRef idx="0"/>
+    <cs:fillRef idx="0"/>
+    <cs:effectRef idx="0"/>
+    <cs:fontRef idx="minor">
+      <a:schemeClr val="tx1"/>
+    </cs:fontRef>
+    <cs:spPr>
+      <a:ln w="9525" cap="flat">
+        <a:solidFill>
+          <a:srgbClr val="D9D9D9"/>
+        </a:solidFill>
+        <a:round/>
+      </a:ln>
+    </cs:spPr>
+  </cs:seriesLine>
+  <cs:title>
+    <cs:lnRef idx="0"/>
+    <cs:fillRef idx="0"/>
+    <cs:effectRef idx="0"/>
+    <cs:fontRef idx="minor">
+      <a:schemeClr val="tx1">
+        <a:lumMod val="65000"/>
+        <a:lumOff val="35000"/>
+      </a:schemeClr>
+    </cs:fontRef>
+    <cs:defRPr sz="1862"/>
+  </cs:title>
+  <cs:trendline>
+    <cs:lnRef idx="0">
+      <cs:styleClr val="auto"/>
+    </cs:lnRef>
+    <cs:fillRef idx="0"/>
+    <cs:effectRef idx="0"/>
+    <cs:fontRef idx="minor">
+      <a:schemeClr val="tx1"/>
+    </cs:fontRef>
+    <cs:spPr>
+      <a:ln w="19050" cap="rnd">
+        <a:solidFill>
+          <a:schemeClr val="phClr"/>
+        </a:solidFill>
+        <a:prstDash val="sysDash"/>
+      </a:ln>
+    </cs:spPr>
+  </cs:trendline>
+  <cs:trendlineLabel>
+    <cs:lnRef idx="0"/>
+    <cs:fillRef idx="0"/>
+    <cs:effectRef idx="0"/>
+    <cs:fontRef idx="minor">
+      <a:schemeClr val="tx1">
+        <a:lumMod val="65000"/>
+        <a:lumOff val="35000"/>
+      </a:schemeClr>
+    </cs:fontRef>
+    <cs:defRPr sz="1197"/>
+  </cs:trendlineLabel>
+  <cs:upBar>
+    <cs:lnRef idx="0"/>
+    <cs:fillRef idx="0"/>
+    <cs:effectRef idx="0"/>
+    <cs:fontRef idx="minor">
+      <a:schemeClr val="dk1"/>
+    </cs:fontRef>
+    <cs:spPr>
+      <a:solidFill>
+        <a:schemeClr val="lt1"/>
+      </a:solidFill>
+      <a:ln w="9525">
+        <a:solidFill>
+          <a:schemeClr val="tx1">
+            <a:lumMod val="15000"/>
+            <a:lumOff val="85000"/>
+          </a:schemeClr>
+        </a:solidFill>
+      </a:ln>
+    </cs:spPr>
+  </cs:upBar>
+  <cs:valueAxis>
+    <cs:lnRef idx="0"/>
+    <cs:fillRef idx="0"/>
+    <cs:effectRef idx="0"/>
+    <cs:fontRef idx="minor">
+      <a:schemeClr val="tx1">
+        <a:lumMod val="65000"/>
+        <a:lumOff val="35000"/>
+      </a:schemeClr>
+    </cs:fontRef>
+    <cs:defRPr sz="1197"/>
+  </cs:valueAxis>
+  <cs:wall>
+    <cs:lnRef idx="0"/>
+    <cs:fillRef idx="0"/>
+    <cs:effectRef idx="0"/>
+    <cs:fontRef idx="minor">
+      <a:schemeClr val="tx1"/>
+    </cs:fontRef>
+  </cs:wall>
+</cs:chartStyle>
+</file>
+
+<file path=ppt/charts/style14.xml><?xml version="1.0" encoding="utf-8"?>
+<cs:chartStyle xmlns:cs="http://schemas.microsoft.com/office/drawing/2012/chartStyle" xmlns:a="http://schemas.openxmlformats.org/drawingml/2006/main" id="419">
+  <cs:axisTitle>
+    <cs:lnRef idx="0"/>
+    <cs:fillRef idx="0"/>
+    <cs:effectRef idx="0"/>
+    <cs:fontRef idx="minor">
+      <a:schemeClr val="tx1">
+        <a:lumMod val="65000"/>
+        <a:lumOff val="35000"/>
+      </a:schemeClr>
+    </cs:fontRef>
+    <cs:defRPr sz="1197"/>
+  </cs:axisTitle>
+  <cs:categoryAxis>
+    <cs:lnRef idx="0"/>
+    <cs:fillRef idx="0"/>
+    <cs:effectRef idx="0"/>
+    <cs:fontRef idx="minor">
+      <a:schemeClr val="tx1">
+        <a:lumMod val="65000"/>
+        <a:lumOff val="35000"/>
+      </a:schemeClr>
+    </cs:fontRef>
+    <cs:spPr>
+      <a:ln w="9525" cap="flat" cmpd="sng" algn="ctr">
+        <a:solidFill>
+          <a:schemeClr val="tx1">
+            <a:lumMod val="15000"/>
+            <a:lumOff val="85000"/>
+          </a:schemeClr>
+        </a:solidFill>
+        <a:round/>
+      </a:ln>
+    </cs:spPr>
+    <cs:defRPr sz="1197"/>
+  </cs:categoryAxis>
+  <cs:chartArea mods="allowNoFillOverride allowNoLineOverride">
+    <cs:lnRef idx="0"/>
+    <cs:fillRef idx="0"/>
+    <cs:effectRef idx="0"/>
+    <cs:fontRef idx="minor">
+      <a:schemeClr val="tx1"/>
+    </cs:fontRef>
+    <cs:spPr>
+      <a:solidFill>
+        <a:schemeClr val="bg1"/>
+      </a:solidFill>
+      <a:ln w="9525" cap="flat" cmpd="sng" algn="ctr">
+        <a:solidFill>
+          <a:schemeClr val="tx1">
+            <a:lumMod val="15000"/>
+            <a:lumOff val="85000"/>
+          </a:schemeClr>
+        </a:solidFill>
+        <a:round/>
+      </a:ln>
+    </cs:spPr>
+    <cs:defRPr sz="1330"/>
+  </cs:chartArea>
+  <cs:dataLabel>
+    <cs:lnRef idx="0"/>
+    <cs:fillRef idx="0"/>
+    <cs:effectRef idx="0"/>
+    <cs:fontRef idx="minor">
+      <a:schemeClr val="tx1">
+        <a:lumMod val="65000"/>
+        <a:lumOff val="35000"/>
+      </a:schemeClr>
+    </cs:fontRef>
+    <cs:defRPr sz="1197"/>
+  </cs:dataLabel>
+  <cs:dataLabelCallout>
+    <cs:lnRef idx="0"/>
+    <cs:fillRef idx="0"/>
+    <cs:effectRef idx="0"/>
+    <cs:fontRef idx="minor">
+      <a:schemeClr val="dk1">
+        <a:lumMod val="65000"/>
+        <a:lumOff val="35000"/>
+      </a:schemeClr>
+    </cs:fontRef>
+    <cs:spPr>
+      <a:solidFill>
+        <a:schemeClr val="lt1"/>
+      </a:solidFill>
+      <a:ln>
+        <a:solidFill>
+          <a:schemeClr val="dk1">
+            <a:lumMod val="25000"/>
+            <a:lumOff val="75000"/>
+          </a:schemeClr>
+        </a:solidFill>
+      </a:ln>
+    </cs:spPr>
+    <cs:defRPr sz="1197"/>
+    <cs:bodyPr rot="0" spcFirstLastPara="1" vertOverflow="clip" horzOverflow="clip" vert="horz" wrap="square" lIns="36576" tIns="18288" rIns="36576" bIns="18288" anchor="ctr" anchorCtr="1">
+      <a:spAutoFit/>
+    </cs:bodyPr>
+  </cs:dataLabelCallout>
+  <cs:dataPoint>
+    <cs:lnRef idx="0"/>
+    <cs:fillRef idx="0">
+      <cs:styleClr val="auto"/>
+    </cs:fillRef>
+    <cs:effectRef idx="0"/>
+    <cs:fontRef idx="minor">
+      <a:schemeClr val="tx1"/>
+    </cs:fontRef>
+    <cs:spPr>
+      <a:solidFill>
+        <a:schemeClr val="phClr"/>
+      </a:solidFill>
+    </cs:spPr>
+  </cs:dataPoint>
+  <cs:dataPoint3D>
+    <cs:lnRef idx="0"/>
+    <cs:fillRef idx="0">
+      <cs:styleClr val="auto"/>
+    </cs:fillRef>
+    <cs:effectRef idx="0"/>
+    <cs:fontRef idx="minor">
+      <a:schemeClr val="tx1"/>
+    </cs:fontRef>
+    <cs:spPr>
+      <a:solidFill>
+        <a:schemeClr val="phClr"/>
+      </a:solidFill>
+    </cs:spPr>
+  </cs:dataPoint3D>
+  <cs:dataPointLine>
+    <cs:lnRef idx="0">
+      <cs:styleClr val="auto"/>
+    </cs:lnRef>
+    <cs:fillRef idx="0"/>
+    <cs:effectRef idx="0"/>
+    <cs:fontRef idx="minor">
+      <a:schemeClr val="tx1"/>
+    </cs:fontRef>
+    <cs:spPr>
+      <a:ln w="28575" cap="rnd">
+        <a:solidFill>
+          <a:schemeClr val="phClr"/>
+        </a:solidFill>
+        <a:round/>
+      </a:ln>
+    </cs:spPr>
+  </cs:dataPointLine>
+  <cs:dataPointMarker>
+    <cs:lnRef idx="0"/>
+    <cs:fillRef idx="0">
+      <cs:styleClr val="auto"/>
+    </cs:fillRef>
+    <cs:effectRef idx="0"/>
+    <cs:fontRef idx="minor">
+      <a:schemeClr val="tx1"/>
+    </cs:fontRef>
+    <cs:spPr>
+      <a:solidFill>
+        <a:schemeClr val="phClr"/>
+      </a:solidFill>
+      <a:ln w="9525">
+        <a:solidFill>
+          <a:schemeClr val="lt1"/>
+        </a:solidFill>
+      </a:ln>
+    </cs:spPr>
+  </cs:dataPointMarker>
+  <cs:dataPointMarkerLayout symbol="circle" size="5"/>
+  <cs:dataPointWireframe>
+    <cs:lnRef idx="0">
+      <cs:styleClr val="auto"/>
+    </cs:lnRef>
+    <cs:fillRef idx="0"/>
+    <cs:effectRef idx="0"/>
+    <cs:fontRef idx="minor">
+      <a:schemeClr val="tx1"/>
+    </cs:fontRef>
+    <cs:spPr>
+      <a:ln w="28575" cap="rnd">
+        <a:solidFill>
+          <a:schemeClr val="phClr"/>
+        </a:solidFill>
+        <a:round/>
+      </a:ln>
+    </cs:spPr>
+  </cs:dataPointWireframe>
+  <cs:dataTable>
+    <cs:lnRef idx="0"/>
+    <cs:fillRef idx="0"/>
+    <cs:effectRef idx="0"/>
+    <cs:fontRef idx="minor">
+      <a:schemeClr val="tx1">
+        <a:lumMod val="65000"/>
+        <a:lumOff val="35000"/>
+      </a:schemeClr>
+    </cs:fontRef>
+    <cs:spPr>
+      <a:ln w="9525">
+        <a:solidFill>
+          <a:schemeClr val="tx1">
+            <a:lumMod val="15000"/>
+            <a:lumOff val="85000"/>
+          </a:schemeClr>
+        </a:solidFill>
+      </a:ln>
+    </cs:spPr>
+    <cs:defRPr sz="1197"/>
+  </cs:dataTable>
+  <cs:downBar>
+    <cs:lnRef idx="0"/>
+    <cs:fillRef idx="0"/>
+    <cs:effectRef idx="0"/>
+    <cs:fontRef idx="minor">
+      <a:schemeClr val="dk1"/>
+    </cs:fontRef>
+    <cs:spPr>
+      <a:solidFill>
+        <a:schemeClr val="dk1">
+          <a:lumMod val="65000"/>
+          <a:lumOff val="35000"/>
+        </a:schemeClr>
+      </a:solidFill>
+      <a:ln w="9525">
+        <a:solidFill>
+          <a:schemeClr val="tx1">
+            <a:lumMod val="65000"/>
+            <a:lumOff val="35000"/>
+          </a:schemeClr>
+        </a:solidFill>
+      </a:ln>
+    </cs:spPr>
+  </cs:downBar>
+  <cs:dropLine>
+    <cs:lnRef idx="0"/>
+    <cs:fillRef idx="0"/>
+    <cs:effectRef idx="0"/>
+    <cs:fontRef idx="minor">
+      <a:schemeClr val="tx1"/>
+    </cs:fontRef>
+    <cs:spPr>
+      <a:ln w="9525" cap="flat" cmpd="sng" algn="ctr">
+        <a:solidFill>
+          <a:schemeClr val="tx1">
+            <a:lumMod val="35000"/>
+            <a:lumOff val="65000"/>
+          </a:schemeClr>
+        </a:solidFill>
+        <a:round/>
+      </a:ln>
+    </cs:spPr>
+  </cs:dropLine>
+  <cs:errorBar>
+    <cs:lnRef idx="0"/>
+    <cs:fillRef idx="0"/>
+    <cs:effectRef idx="0"/>
+    <cs:fontRef idx="minor">
+      <a:schemeClr val="tx1"/>
+    </cs:fontRef>
+    <cs:spPr>
+      <a:ln w="9525" cap="flat" cmpd="sng" algn="ctr">
+        <a:solidFill>
+          <a:schemeClr val="tx1">
+            <a:lumMod val="65000"/>
+            <a:lumOff val="35000"/>
+          </a:schemeClr>
+        </a:solidFill>
+        <a:round/>
+      </a:ln>
+    </cs:spPr>
+  </cs:errorBar>
+  <cs:floor>
+    <cs:lnRef idx="0"/>
+    <cs:fillRef idx="0"/>
+    <cs:effectRef idx="0"/>
+    <cs:fontRef idx="minor">
+      <a:schemeClr val="tx1"/>
+    </cs:fontRef>
+  </cs:floor>
+  <cs:gridlineMajor>
+    <cs:lnRef idx="0"/>
+    <cs:fillRef idx="0"/>
+    <cs:effectRef idx="0"/>
+    <cs:fontRef idx="minor">
+      <a:schemeClr val="tx1"/>
+    </cs:fontRef>
+    <cs:spPr>
+      <a:ln w="9525" cap="flat" cmpd="sng" algn="ctr">
+        <a:solidFill>
+          <a:schemeClr val="tx1">
+            <a:lumMod val="15000"/>
+            <a:lumOff val="85000"/>
+          </a:schemeClr>
+        </a:solidFill>
+        <a:round/>
+      </a:ln>
+    </cs:spPr>
+  </cs:gridlineMajor>
+  <cs:gridlineMinor>
+    <cs:lnRef idx="0"/>
+    <cs:fillRef idx="0"/>
+    <cs:effectRef idx="0"/>
+    <cs:fontRef idx="minor">
+      <a:schemeClr val="tx1"/>
+    </cs:fontRef>
+    <cs:spPr>
+      <a:ln w="9525" cap="flat" cmpd="sng" algn="ctr">
+        <a:solidFill>
+          <a:schemeClr val="tx1">
+            <a:lumMod val="15000"/>
+            <a:lumOff val="85000"/>
+          </a:schemeClr>
+        </a:solidFill>
+        <a:round/>
+      </a:ln>
+    </cs:spPr>
+  </cs:gridlineMinor>
+  <cs:hiLoLine>
+    <cs:lnRef idx="0"/>
+    <cs:fillRef idx="0"/>
+    <cs:effectRef idx="0"/>
+    <cs:fontRef idx="minor">
+      <a:schemeClr val="tx1"/>
+    </cs:fontRef>
+    <cs:spPr>
+      <a:ln w="9525" cap="flat" cmpd="sng" algn="ctr">
+        <a:solidFill>
+          <a:schemeClr val="tx1">
+            <a:lumMod val="75000"/>
+            <a:lumOff val="25000"/>
+          </a:schemeClr>
+        </a:solidFill>
+        <a:round/>
+      </a:ln>
+    </cs:spPr>
+  </cs:hiLoLine>
+  <cs:leaderLine>
+    <cs:lnRef idx="0"/>
+    <cs:fillRef idx="0"/>
+    <cs:effectRef idx="0"/>
+    <cs:fontRef idx="minor">
+      <a:schemeClr val="tx1"/>
+    </cs:fontRef>
+    <cs:spPr>
+      <a:ln w="9525" cap="flat" cmpd="sng" algn="ctr">
+        <a:solidFill>
+          <a:schemeClr val="tx1">
+            <a:lumMod val="35000"/>
+            <a:lumOff val="65000"/>
+          </a:schemeClr>
+        </a:solidFill>
+        <a:round/>
+      </a:ln>
+    </cs:spPr>
+  </cs:leaderLine>
+  <cs:legend>
+    <cs:lnRef idx="0"/>
+    <cs:fillRef idx="0"/>
+    <cs:effectRef idx="0"/>
+    <cs:fontRef idx="minor">
+      <a:schemeClr val="tx1">
+        <a:lumMod val="65000"/>
+        <a:lumOff val="35000"/>
+      </a:schemeClr>
+    </cs:fontRef>
+    <cs:defRPr sz="1197"/>
+  </cs:legend>
+  <cs:plotArea mods="allowNoFillOverride allowNoLineOverride">
+    <cs:lnRef idx="0"/>
+    <cs:fillRef idx="0"/>
+    <cs:effectRef idx="0"/>
+    <cs:fontRef idx="minor">
+      <a:schemeClr val="tx1"/>
+    </cs:fontRef>
+  </cs:plotArea>
+  <cs:plotArea3D mods="allowNoFillOverride allowNoLineOverride">
+    <cs:lnRef idx="0"/>
+    <cs:fillRef idx="0"/>
+    <cs:effectRef idx="0"/>
+    <cs:fontRef idx="minor">
+      <a:schemeClr val="tx1"/>
+    </cs:fontRef>
+  </cs:plotArea3D>
+  <cs:seriesAxis>
+    <cs:lnRef idx="0"/>
+    <cs:fillRef idx="0"/>
+    <cs:effectRef idx="0"/>
+    <cs:fontRef idx="minor">
+      <a:schemeClr val="tx1">
+        <a:lumMod val="65000"/>
+        <a:lumOff val="35000"/>
+      </a:schemeClr>
+    </cs:fontRef>
+    <cs:spPr>
+      <a:ln w="9525" cap="flat" cmpd="sng" algn="ctr">
+        <a:solidFill>
+          <a:schemeClr val="tx1">
+            <a:lumMod val="15000"/>
+            <a:lumOff val="85000"/>
+          </a:schemeClr>
+        </a:solidFill>
+        <a:round/>
+      </a:ln>
+    </cs:spPr>
+    <cs:defRPr sz="1197"/>
+  </cs:seriesAxis>
+  <cs:seriesLine>
+    <cs:lnRef idx="0"/>
+    <cs:fillRef idx="0"/>
+    <cs:effectRef idx="0"/>
+    <cs:fontRef idx="minor">
+      <a:schemeClr val="tx1"/>
+    </cs:fontRef>
+    <cs:spPr>
+      <a:ln w="9525" cap="flat">
+        <a:solidFill>
+          <a:srgbClr val="D9D9D9"/>
+        </a:solidFill>
+        <a:round/>
+      </a:ln>
+    </cs:spPr>
+  </cs:seriesLine>
+  <cs:title>
+    <cs:lnRef idx="0"/>
+    <cs:fillRef idx="0"/>
+    <cs:effectRef idx="0"/>
+    <cs:fontRef idx="minor">
+      <a:schemeClr val="tx1">
+        <a:lumMod val="65000"/>
+        <a:lumOff val="35000"/>
+      </a:schemeClr>
+    </cs:fontRef>
+    <cs:defRPr sz="1862"/>
+  </cs:title>
+  <cs:trendline>
+    <cs:lnRef idx="0">
+      <cs:styleClr val="auto"/>
+    </cs:lnRef>
+    <cs:fillRef idx="0"/>
+    <cs:effectRef idx="0"/>
+    <cs:fontRef idx="minor">
+      <a:schemeClr val="tx1"/>
+    </cs:fontRef>
+    <cs:spPr>
+      <a:ln w="19050" cap="rnd">
+        <a:solidFill>
+          <a:schemeClr val="phClr"/>
+        </a:solidFill>
+        <a:prstDash val="sysDash"/>
+      </a:ln>
+    </cs:spPr>
+  </cs:trendline>
+  <cs:trendlineLabel>
+    <cs:lnRef idx="0"/>
+    <cs:fillRef idx="0"/>
+    <cs:effectRef idx="0"/>
+    <cs:fontRef idx="minor">
+      <a:schemeClr val="tx1">
+        <a:lumMod val="65000"/>
+        <a:lumOff val="35000"/>
+      </a:schemeClr>
+    </cs:fontRef>
+    <cs:defRPr sz="1197"/>
+  </cs:trendlineLabel>
+  <cs:upBar>
+    <cs:lnRef idx="0"/>
+    <cs:fillRef idx="0"/>
+    <cs:effectRef idx="0"/>
+    <cs:fontRef idx="minor">
+      <a:schemeClr val="dk1"/>
+    </cs:fontRef>
+    <cs:spPr>
+      <a:solidFill>
+        <a:schemeClr val="lt1"/>
+      </a:solidFill>
+      <a:ln w="9525">
+        <a:solidFill>
+          <a:schemeClr val="tx1">
+            <a:lumMod val="15000"/>
+            <a:lumOff val="85000"/>
+          </a:schemeClr>
+        </a:solidFill>
+      </a:ln>
+    </cs:spPr>
+  </cs:upBar>
+  <cs:valueAxis>
+    <cs:lnRef idx="0"/>
+    <cs:fillRef idx="0"/>
+    <cs:effectRef idx="0"/>
+    <cs:fontRef idx="minor">
+      <a:schemeClr val="tx1">
+        <a:lumMod val="65000"/>
+        <a:lumOff val="35000"/>
+      </a:schemeClr>
+    </cs:fontRef>
+    <cs:defRPr sz="1197"/>
+  </cs:valueAxis>
+  <cs:wall>
+    <cs:lnRef idx="0"/>
+    <cs:fillRef idx="0"/>
+    <cs:effectRef idx="0"/>
+    <cs:fontRef idx="minor">
+      <a:schemeClr val="tx1"/>
+    </cs:fontRef>
+  </cs:wall>
+</cs:chartStyle>
+</file>
+
+<file path=ppt/charts/style18.xml><?xml version="1.0" encoding="utf-8"?>
+<cs:chartStyle xmlns:cs="http://schemas.microsoft.com/office/drawing/2012/chartStyle" xmlns:a="http://schemas.openxmlformats.org/drawingml/2006/main" id="419">
+  <cs:axisTitle>
+    <cs:lnRef idx="0"/>
+    <cs:fillRef idx="0"/>
+    <cs:effectRef idx="0"/>
+    <cs:fontRef idx="minor">
+      <a:schemeClr val="tx1">
+        <a:lumMod val="65000"/>
+        <a:lumOff val="35000"/>
+      </a:schemeClr>
+    </cs:fontRef>
+    <cs:defRPr sz="1197"/>
+  </cs:axisTitle>
+  <cs:categoryAxis>
+    <cs:lnRef idx="0"/>
+    <cs:fillRef idx="0"/>
+    <cs:effectRef idx="0"/>
+    <cs:fontRef idx="minor">
+      <a:schemeClr val="tx1">
+        <a:lumMod val="65000"/>
+        <a:lumOff val="35000"/>
+      </a:schemeClr>
+    </cs:fontRef>
+    <cs:spPr>
+      <a:ln w="9525" cap="flat" cmpd="sng" algn="ctr">
+        <a:solidFill>
+          <a:schemeClr val="tx1">
+            <a:lumMod val="15000"/>
+            <a:lumOff val="85000"/>
+          </a:schemeClr>
+        </a:solidFill>
+        <a:round/>
+      </a:ln>
+    </cs:spPr>
+    <cs:defRPr sz="1197"/>
+  </cs:categoryAxis>
+  <cs:chartArea mods="allowNoFillOverride allowNoLineOverride">
+    <cs:lnRef idx="0"/>
+    <cs:fillRef idx="0"/>
+    <cs:effectRef idx="0"/>
+    <cs:fontRef idx="minor">
+      <a:schemeClr val="tx1"/>
+    </cs:fontRef>
+    <cs:spPr>
+      <a:solidFill>
+        <a:schemeClr val="bg1"/>
+      </a:solidFill>
+      <a:ln w="9525" cap="flat" cmpd="sng" algn="ctr">
+        <a:solidFill>
+          <a:schemeClr val="tx1">
+            <a:lumMod val="15000"/>
+            <a:lumOff val="85000"/>
+          </a:schemeClr>
+        </a:solidFill>
+        <a:round/>
+      </a:ln>
+    </cs:spPr>
+    <cs:defRPr sz="1330"/>
+  </cs:chartArea>
+  <cs:dataLabel>
+    <cs:lnRef idx="0"/>
+    <cs:fillRef idx="0"/>
+    <cs:effectRef idx="0"/>
+    <cs:fontRef idx="minor">
+      <a:schemeClr val="tx1">
+        <a:lumMod val="65000"/>
+        <a:lumOff val="35000"/>
+      </a:schemeClr>
+    </cs:fontRef>
+    <cs:defRPr sz="1197"/>
+  </cs:dataLabel>
+  <cs:dataLabelCallout>
+    <cs:lnRef idx="0"/>
+    <cs:fillRef idx="0"/>
+    <cs:effectRef idx="0"/>
+    <cs:fontRef idx="minor">
+      <a:schemeClr val="dk1">
+        <a:lumMod val="65000"/>
+        <a:lumOff val="35000"/>
+      </a:schemeClr>
+    </cs:fontRef>
+    <cs:spPr>
+      <a:solidFill>
+        <a:schemeClr val="lt1"/>
+      </a:solidFill>
+      <a:ln>
+        <a:solidFill>
+          <a:schemeClr val="dk1">
+            <a:lumMod val="25000"/>
+            <a:lumOff val="75000"/>
+          </a:schemeClr>
+        </a:solidFill>
+      </a:ln>
+    </cs:spPr>
+    <cs:defRPr sz="1197"/>
+    <cs:bodyPr rot="0" spcFirstLastPara="1" vertOverflow="clip" horzOverflow="clip" vert="horz" wrap="square" lIns="36576" tIns="18288" rIns="36576" bIns="18288" anchor="ctr" anchorCtr="1">
+      <a:spAutoFit/>
+    </cs:bodyPr>
+  </cs:dataLabelCallout>
+  <cs:dataPoint>
+    <cs:lnRef idx="0"/>
+    <cs:fillRef idx="0">
+      <cs:styleClr val="auto"/>
+    </cs:fillRef>
+    <cs:effectRef idx="0"/>
+    <cs:fontRef idx="minor">
+      <a:schemeClr val="tx1"/>
+    </cs:fontRef>
+    <cs:spPr>
+      <a:solidFill>
+        <a:schemeClr val="phClr"/>
+      </a:solidFill>
+    </cs:spPr>
+  </cs:dataPoint>
+  <cs:dataPoint3D>
+    <cs:lnRef idx="0"/>
+    <cs:fillRef idx="0">
+      <cs:styleClr val="auto"/>
+    </cs:fillRef>
+    <cs:effectRef idx="0"/>
+    <cs:fontRef idx="minor">
+      <a:schemeClr val="tx1"/>
+    </cs:fontRef>
+    <cs:spPr>
+      <a:solidFill>
+        <a:schemeClr val="phClr"/>
+      </a:solidFill>
+    </cs:spPr>
+  </cs:dataPoint3D>
+  <cs:dataPointLine>
+    <cs:lnRef idx="0">
+      <cs:styleClr val="auto"/>
+    </cs:lnRef>
+    <cs:fillRef idx="0"/>
+    <cs:effectRef idx="0"/>
+    <cs:fontRef idx="minor">
+      <a:schemeClr val="tx1"/>
+    </cs:fontRef>
+    <cs:spPr>
+      <a:ln w="28575" cap="rnd">
+        <a:solidFill>
+          <a:schemeClr val="phClr"/>
+        </a:solidFill>
+        <a:round/>
+      </a:ln>
+    </cs:spPr>
+  </cs:dataPointLine>
+  <cs:dataPointMarker>
+    <cs:lnRef idx="0"/>
+    <cs:fillRef idx="0">
+      <cs:styleClr val="auto"/>
+    </cs:fillRef>
+    <cs:effectRef idx="0"/>
+    <cs:fontRef idx="minor">
+      <a:schemeClr val="tx1"/>
+    </cs:fontRef>
+    <cs:spPr>
+      <a:solidFill>
+        <a:schemeClr val="phClr"/>
+      </a:solidFill>
+      <a:ln w="9525">
+        <a:solidFill>
+          <a:schemeClr val="lt1"/>
+        </a:solidFill>
+      </a:ln>
+    </cs:spPr>
+  </cs:dataPointMarker>
+  <cs:dataPointMarkerLayout symbol="circle" size="5"/>
+  <cs:dataPointWireframe>
+    <cs:lnRef idx="0">
+      <cs:styleClr val="auto"/>
+    </cs:lnRef>
+    <cs:fillRef idx="0"/>
+    <cs:effectRef idx="0"/>
+    <cs:fontRef idx="minor">
+      <a:schemeClr val="tx1"/>
+    </cs:fontRef>
+    <cs:spPr>
+      <a:ln w="28575" cap="rnd">
+        <a:solidFill>
+          <a:schemeClr val="phClr"/>
+        </a:solidFill>
+        <a:round/>
+      </a:ln>
+    </cs:spPr>
+  </cs:dataPointWireframe>
+  <cs:dataTable>
+    <cs:lnRef idx="0"/>
+    <cs:fillRef idx="0"/>
+    <cs:effectRef idx="0"/>
+    <cs:fontRef idx="minor">
+      <a:schemeClr val="tx1">
+        <a:lumMod val="65000"/>
+        <a:lumOff val="35000"/>
+      </a:schemeClr>
+    </cs:fontRef>
+    <cs:spPr>
+      <a:ln w="9525">
+        <a:solidFill>
+          <a:schemeClr val="tx1">
+            <a:lumMod val="15000"/>
+            <a:lumOff val="85000"/>
+          </a:schemeClr>
+        </a:solidFill>
+      </a:ln>
+    </cs:spPr>
+    <cs:defRPr sz="1197"/>
+  </cs:dataTable>
+  <cs:downBar>
+    <cs:lnRef idx="0"/>
+    <cs:fillRef idx="0"/>
+    <cs:effectRef idx="0"/>
+    <cs:fontRef idx="minor">
+      <a:schemeClr val="dk1"/>
+    </cs:fontRef>
+    <cs:spPr>
+      <a:solidFill>
+        <a:schemeClr val="dk1">
+          <a:lumMod val="65000"/>
+          <a:lumOff val="35000"/>
+        </a:schemeClr>
+      </a:solidFill>
+      <a:ln w="9525">
+        <a:solidFill>
+          <a:schemeClr val="tx1">
+            <a:lumMod val="65000"/>
+            <a:lumOff val="35000"/>
+          </a:schemeClr>
+        </a:solidFill>
+      </a:ln>
+    </cs:spPr>
+  </cs:downBar>
+  <cs:dropLine>
+    <cs:lnRef idx="0"/>
+    <cs:fillRef idx="0"/>
+    <cs:effectRef idx="0"/>
+    <cs:fontRef idx="minor">
+      <a:schemeClr val="tx1"/>
+    </cs:fontRef>
+    <cs:spPr>
+      <a:ln w="9525" cap="flat" cmpd="sng" algn="ctr">
+        <a:solidFill>
+          <a:schemeClr val="tx1">
+            <a:lumMod val="35000"/>
+            <a:lumOff val="65000"/>
+          </a:schemeClr>
+        </a:solidFill>
+        <a:round/>
+      </a:ln>
+    </cs:spPr>
+  </cs:dropLine>
+  <cs:errorBar>
+    <cs:lnRef idx="0"/>
+    <cs:fillRef idx="0"/>
+    <cs:effectRef idx="0"/>
+    <cs:fontRef idx="minor">
+      <a:schemeClr val="tx1"/>
+    </cs:fontRef>
+    <cs:spPr>
+      <a:ln w="9525" cap="flat" cmpd="sng" algn="ctr">
+        <a:solidFill>
+          <a:schemeClr val="tx1">
+            <a:lumMod val="65000"/>
+            <a:lumOff val="35000"/>
+          </a:schemeClr>
+        </a:solidFill>
+        <a:round/>
+      </a:ln>
+    </cs:spPr>
+  </cs:errorBar>
+  <cs:floor>
+    <cs:lnRef idx="0"/>
+    <cs:fillRef idx="0"/>
+    <cs:effectRef idx="0"/>
+    <cs:fontRef idx="minor">
+      <a:schemeClr val="tx1"/>
+    </cs:fontRef>
+  </cs:floor>
+  <cs:gridlineMajor>
+    <cs:lnRef idx="0"/>
+    <cs:fillRef idx="0"/>
+    <cs:effectRef idx="0"/>
+    <cs:fontRef idx="minor">
+      <a:schemeClr val="tx1"/>
+    </cs:fontRef>
+    <cs:spPr>
+      <a:ln w="9525" cap="flat" cmpd="sng" algn="ctr">
+        <a:solidFill>
+          <a:schemeClr val="tx1">
+            <a:lumMod val="15000"/>
+            <a:lumOff val="85000"/>
+          </a:schemeClr>
+        </a:solidFill>
+        <a:round/>
+      </a:ln>
+    </cs:spPr>
+  </cs:gridlineMajor>
+  <cs:gridlineMinor>
+    <cs:lnRef idx="0"/>
+    <cs:fillRef idx="0"/>
+    <cs:effectRef idx="0"/>
+    <cs:fontRef idx="minor">
+      <a:schemeClr val="tx1"/>
+    </cs:fontRef>
+    <cs:spPr>
+      <a:ln w="9525" cap="flat" cmpd="sng" algn="ctr">
+        <a:solidFill>
+          <a:schemeClr val="tx1">
+            <a:lumMod val="15000"/>
+            <a:lumOff val="85000"/>
+          </a:schemeClr>
+        </a:solidFill>
+        <a:round/>
+      </a:ln>
+    </cs:spPr>
+  </cs:gridlineMinor>
+  <cs:hiLoLine>
+    <cs:lnRef idx="0"/>
+    <cs:fillRef idx="0"/>
+    <cs:effectRef idx="0"/>
+    <cs:fontRef idx="minor">
+      <a:schemeClr val="tx1"/>
+    </cs:fontRef>
+    <cs:spPr>
+      <a:ln w="9525" cap="flat" cmpd="sng" algn="ctr">
+        <a:solidFill>
+          <a:schemeClr val="tx1">
+            <a:lumMod val="75000"/>
+            <a:lumOff val="25000"/>
+          </a:schemeClr>
+        </a:solidFill>
+        <a:round/>
+      </a:ln>
+    </cs:spPr>
+  </cs:hiLoLine>
+  <cs:leaderLine>
+    <cs:lnRef idx="0"/>
+    <cs:fillRef idx="0"/>
+    <cs:effectRef idx="0"/>
+    <cs:fontRef idx="minor">
+      <a:schemeClr val="tx1"/>
+    </cs:fontRef>
+    <cs:spPr>
+      <a:ln w="9525" cap="flat" cmpd="sng" algn="ctr">
+        <a:solidFill>
+          <a:schemeClr val="tx1">
+            <a:lumMod val="35000"/>
+            <a:lumOff val="65000"/>
+          </a:schemeClr>
+        </a:solidFill>
+        <a:round/>
+      </a:ln>
+    </cs:spPr>
+  </cs:leaderLine>
+  <cs:legend>
+    <cs:lnRef idx="0"/>
+    <cs:fillRef idx="0"/>
+    <cs:effectRef idx="0"/>
+    <cs:fontRef idx="minor">
+      <a:schemeClr val="tx1">
+        <a:lumMod val="65000"/>
+        <a:lumOff val="35000"/>
+      </a:schemeClr>
+    </cs:fontRef>
+    <cs:defRPr sz="1197"/>
+  </cs:legend>
+  <cs:plotArea mods="allowNoFillOverride allowNoLineOverride">
+    <cs:lnRef idx="0"/>
+    <cs:fillRef idx="0"/>
+    <cs:effectRef idx="0"/>
+    <cs:fontRef idx="minor">
+      <a:schemeClr val="tx1"/>
+    </cs:fontRef>
+  </cs:plotArea>
+  <cs:plotArea3D mods="allowNoFillOverride allowNoLineOverride">
+    <cs:lnRef idx="0"/>
+    <cs:fillRef idx="0"/>
+    <cs:effectRef idx="0"/>
+    <cs:fontRef idx="minor">
+      <a:schemeClr val="tx1"/>
+    </cs:fontRef>
+  </cs:plotArea3D>
+  <cs:seriesAxis>
+    <cs:lnRef idx="0"/>
+    <cs:fillRef idx="0"/>
+    <cs:effectRef idx="0"/>
+    <cs:fontRef idx="minor">
+      <a:schemeClr val="tx1">
+        <a:lumMod val="65000"/>
+        <a:lumOff val="35000"/>
+      </a:schemeClr>
+    </cs:fontRef>
+    <cs:spPr>
+      <a:ln w="9525" cap="flat" cmpd="sng" algn="ctr">
+        <a:solidFill>
+          <a:schemeClr val="tx1">
+            <a:lumMod val="15000"/>
+            <a:lumOff val="85000"/>
+          </a:schemeClr>
+        </a:solidFill>
+        <a:round/>
+      </a:ln>
+    </cs:spPr>
+    <cs:defRPr sz="1197"/>
+  </cs:seriesAxis>
+  <cs:seriesLine>
+    <cs:lnRef idx="0"/>
+    <cs:fillRef idx="0"/>
+    <cs:effectRef idx="0"/>
+    <cs:fontRef idx="minor">
+      <a:schemeClr val="tx1"/>
+    </cs:fontRef>
+    <cs:spPr>
+      <a:ln w="9525" cap="flat">
+        <a:solidFill>
+          <a:srgbClr val="D9D9D9"/>
+        </a:solidFill>
+        <a:round/>
+      </a:ln>
+    </cs:spPr>
+  </cs:seriesLine>
+  <cs:title>
+    <cs:lnRef idx="0"/>
+    <cs:fillRef idx="0"/>
+    <cs:effectRef idx="0"/>
+    <cs:fontRef idx="minor">
+      <a:schemeClr val="tx1">
+        <a:lumMod val="65000"/>
+        <a:lumOff val="35000"/>
+      </a:schemeClr>
+    </cs:fontRef>
+    <cs:defRPr sz="1862"/>
+  </cs:title>
+  <cs:trendline>
+    <cs:lnRef idx="0">
+      <cs:styleClr val="auto"/>
+    </cs:lnRef>
+    <cs:fillRef idx="0"/>
+    <cs:effectRef idx="0"/>
+    <cs:fontRef idx="minor">
+      <a:schemeClr val="tx1"/>
+    </cs:fontRef>
+    <cs:spPr>
+      <a:ln w="19050" cap="rnd">
+        <a:solidFill>
+          <a:schemeClr val="phClr"/>
+        </a:solidFill>
+        <a:prstDash val="sysDash"/>
+      </a:ln>
+    </cs:spPr>
+  </cs:trendline>
+  <cs:trendlineLabel>
+    <cs:lnRef idx="0"/>
+    <cs:fillRef idx="0"/>
+    <cs:effectRef idx="0"/>
+    <cs:fontRef idx="minor">
+      <a:schemeClr val="tx1">
+        <a:lumMod val="65000"/>
+        <a:lumOff val="35000"/>
+      </a:schemeClr>
+    </cs:fontRef>
+    <cs:defRPr sz="1197"/>
+  </cs:trendlineLabel>
+  <cs:upBar>
+    <cs:lnRef idx="0"/>
+    <cs:fillRef idx="0"/>
+    <cs:effectRef idx="0"/>
+    <cs:fontRef idx="minor">
+      <a:schemeClr val="dk1"/>
+    </cs:fontRef>
+    <cs:spPr>
+      <a:solidFill>
+        <a:schemeClr val="lt1"/>
+      </a:solidFill>
+      <a:ln w="9525">
+        <a:solidFill>
+          <a:schemeClr val="tx1">
+            <a:lumMod val="15000"/>
+            <a:lumOff val="85000"/>
+          </a:schemeClr>
+        </a:solidFill>
+      </a:ln>
+    </cs:spPr>
+  </cs:upBar>
+  <cs:valueAxis>
+    <cs:lnRef idx="0"/>
+    <cs:fillRef idx="0"/>
+    <cs:effectRef idx="0"/>
+    <cs:fontRef idx="minor">
+      <a:schemeClr val="tx1">
+        <a:lumMod val="65000"/>
+        <a:lumOff val="35000"/>
+      </a:schemeClr>
+    </cs:fontRef>
+    <cs:defRPr sz="1197"/>
+  </cs:valueAxis>
+  <cs:wall>
+    <cs:lnRef idx="0"/>
+    <cs:fillRef idx="0"/>
+    <cs:effectRef idx="0"/>
+    <cs:fontRef idx="minor">
+      <a:schemeClr val="tx1"/>
+    </cs:fontRef>
+  </cs:wall>
+</cs:chartStyle>
+</file>
+
+<file path=ppt/charts/style19.xml><?xml version="1.0" encoding="utf-8"?>
+<cs:chartStyle xmlns:cs="http://schemas.microsoft.com/office/drawing/2012/chartStyle" xmlns:a="http://schemas.openxmlformats.org/drawingml/2006/main" id="419">
+  <cs:axisTitle>
+    <cs:lnRef idx="0"/>
+    <cs:fillRef idx="0"/>
+    <cs:effectRef idx="0"/>
+    <cs:fontRef idx="minor">
+      <a:schemeClr val="tx1">
+        <a:lumMod val="65000"/>
+        <a:lumOff val="35000"/>
+      </a:schemeClr>
+    </cs:fontRef>
+    <cs:defRPr sz="1197"/>
+  </cs:axisTitle>
+  <cs:categoryAxis>
+    <cs:lnRef idx="0"/>
+    <cs:fillRef idx="0"/>
+    <cs:effectRef idx="0"/>
+    <cs:fontRef idx="minor">
+      <a:schemeClr val="tx1">
+        <a:lumMod val="65000"/>
+        <a:lumOff val="35000"/>
+      </a:schemeClr>
+    </cs:fontRef>
+    <cs:spPr>
+      <a:ln w="9525" cap="flat" cmpd="sng" algn="ctr">
+        <a:solidFill>
+          <a:schemeClr val="tx1">
+            <a:lumMod val="15000"/>
+            <a:lumOff val="85000"/>
+          </a:schemeClr>
+        </a:solidFill>
+        <a:round/>
+      </a:ln>
+    </cs:spPr>
+    <cs:defRPr sz="1197"/>
+  </cs:categoryAxis>
+  <cs:chartArea mods="allowNoFillOverride allowNoLineOverride">
+    <cs:lnRef idx="0"/>
+    <cs:fillRef idx="0"/>
+    <cs:effectRef idx="0"/>
+    <cs:fontRef idx="minor">
+      <a:schemeClr val="tx1"/>
+    </cs:fontRef>
+    <cs:spPr>
+      <a:solidFill>
+        <a:schemeClr val="bg1"/>
+      </a:solidFill>
+      <a:ln w="9525" cap="flat" cmpd="sng" algn="ctr">
+        <a:solidFill>
+          <a:schemeClr val="tx1">
+            <a:lumMod val="15000"/>
+            <a:lumOff val="85000"/>
+          </a:schemeClr>
+        </a:solidFill>
+        <a:round/>
+      </a:ln>
+    </cs:spPr>
+    <cs:defRPr sz="1330"/>
+  </cs:chartArea>
+  <cs:dataLabel>
+    <cs:lnRef idx="0"/>
+    <cs:fillRef idx="0"/>
+    <cs:effectRef idx="0"/>
+    <cs:fontRef idx="minor">
+      <a:schemeClr val="tx1">
+        <a:lumMod val="65000"/>
+        <a:lumOff val="35000"/>
+      </a:schemeClr>
+    </cs:fontRef>
+    <cs:defRPr sz="1197"/>
+  </cs:dataLabel>
+  <cs:dataLabelCallout>
+    <cs:lnRef idx="0"/>
+    <cs:fillRef idx="0"/>
+    <cs:effectRef idx="0"/>
+    <cs:fontRef idx="minor">
+      <a:schemeClr val="dk1">
+        <a:lumMod val="65000"/>
+        <a:lumOff val="35000"/>
+      </a:schemeClr>
+    </cs:fontRef>
+    <cs:spPr>
+      <a:solidFill>
+        <a:schemeClr val="lt1"/>
+      </a:solidFill>
+      <a:ln>
+        <a:solidFill>
+          <a:schemeClr val="dk1">
+            <a:lumMod val="25000"/>
+            <a:lumOff val="75000"/>
+          </a:schemeClr>
+        </a:solidFill>
+      </a:ln>
+    </cs:spPr>
+    <cs:defRPr sz="1197"/>
+    <cs:bodyPr rot="0" spcFirstLastPara="1" vertOverflow="clip" horzOverflow="clip" vert="horz" wrap="square" lIns="36576" tIns="18288" rIns="36576" bIns="18288" anchor="ctr" anchorCtr="1">
+      <a:spAutoFit/>
+    </cs:bodyPr>
+  </cs:dataLabelCallout>
+  <cs:dataPoint>
+    <cs:lnRef idx="0"/>
+    <cs:fillRef idx="0">
+      <cs:styleClr val="auto"/>
+    </cs:fillRef>
+    <cs:effectRef idx="0"/>
+    <cs:fontRef idx="minor">
+      <a:schemeClr val="tx1"/>
+    </cs:fontRef>
+    <cs:spPr>
+      <a:solidFill>
+        <a:schemeClr val="phClr"/>
+      </a:solidFill>
+    </cs:spPr>
+  </cs:dataPoint>
+  <cs:dataPoint3D>
+    <cs:lnRef idx="0"/>
+    <cs:fillRef idx="0">
+      <cs:styleClr val="auto"/>
+    </cs:fillRef>
+    <cs:effectRef idx="0"/>
+    <cs:fontRef idx="minor">
+      <a:schemeClr val="tx1"/>
+    </cs:fontRef>
+    <cs:spPr>
+      <a:solidFill>
+        <a:schemeClr val="phClr"/>
+      </a:solidFill>
+    </cs:spPr>
+  </cs:dataPoint3D>
+  <cs:dataPointLine>
+    <cs:lnRef idx="0">
+      <cs:styleClr val="auto"/>
+    </cs:lnRef>
+    <cs:fillRef idx="0"/>
+    <cs:effectRef idx="0"/>
+    <cs:fontRef idx="minor">
+      <a:schemeClr val="tx1"/>
+    </cs:fontRef>
+    <cs:spPr>
+      <a:ln w="28575" cap="rnd">
+        <a:solidFill>
+          <a:schemeClr val="phClr"/>
+        </a:solidFill>
+        <a:round/>
+      </a:ln>
+    </cs:spPr>
+  </cs:dataPointLine>
+  <cs:dataPointMarker>
+    <cs:lnRef idx="0"/>
+    <cs:fillRef idx="0">
+      <cs:styleClr val="auto"/>
+    </cs:fillRef>
+    <cs:effectRef idx="0"/>
+    <cs:fontRef idx="minor">
+      <a:schemeClr val="tx1"/>
+    </cs:fontRef>
+    <cs:spPr>
+      <a:solidFill>
+        <a:schemeClr val="phClr"/>
+      </a:solidFill>
+      <a:ln w="9525">
+        <a:solidFill>
+          <a:schemeClr val="lt1"/>
+        </a:solidFill>
+      </a:ln>
+    </cs:spPr>
+  </cs:dataPointMarker>
+  <cs:dataPointMarkerLayout symbol="circle" size="5"/>
+  <cs:dataPointWireframe>
+    <cs:lnRef idx="0">
+      <cs:styleClr val="auto"/>
+    </cs:lnRef>
+    <cs:fillRef idx="0"/>
+    <cs:effectRef idx="0"/>
+    <cs:fontRef idx="minor">
+      <a:schemeClr val="tx1"/>
+    </cs:fontRef>
+    <cs:spPr>
+      <a:ln w="28575" cap="rnd">
+        <a:solidFill>
+          <a:schemeClr val="phClr"/>
+        </a:solidFill>
+        <a:round/>
+      </a:ln>
+    </cs:spPr>
+  </cs:dataPointWireframe>
+  <cs:dataTable>
+    <cs:lnRef idx="0"/>
+    <cs:fillRef idx="0"/>
+    <cs:effectRef idx="0"/>
+    <cs:fontRef idx="minor">
+      <a:schemeClr val="tx1">
+        <a:lumMod val="65000"/>
+        <a:lumOff val="35000"/>
+      </a:schemeClr>
+    </cs:fontRef>
+    <cs:spPr>
+      <a:ln w="9525">
+        <a:solidFill>
+          <a:schemeClr val="tx1">
+            <a:lumMod val="15000"/>
+            <a:lumOff val="85000"/>
+          </a:schemeClr>
+        </a:solidFill>
+      </a:ln>
+    </cs:spPr>
+    <cs:defRPr sz="1197"/>
+  </cs:dataTable>
+  <cs:downBar>
+    <cs:lnRef idx="0"/>
+    <cs:fillRef idx="0"/>
+    <cs:effectRef idx="0"/>
+    <cs:fontRef idx="minor">
+      <a:schemeClr val="dk1"/>
+    </cs:fontRef>
+    <cs:spPr>
+      <a:solidFill>
+        <a:schemeClr val="dk1">
+          <a:lumMod val="65000"/>
+          <a:lumOff val="35000"/>
+        </a:schemeClr>
+      </a:solidFill>
+      <a:ln w="9525">
+        <a:solidFill>
+          <a:schemeClr val="tx1">
+            <a:lumMod val="65000"/>
+            <a:lumOff val="35000"/>
+          </a:schemeClr>
+        </a:solidFill>
+      </a:ln>
+    </cs:spPr>
+  </cs:downBar>
+  <cs:dropLine>
+    <cs:lnRef idx="0"/>
+    <cs:fillRef idx="0"/>
+    <cs:effectRef idx="0"/>
+    <cs:fontRef idx="minor">
+      <a:schemeClr val="tx1"/>
+    </cs:fontRef>
+    <cs:spPr>
+      <a:ln w="9525" cap="flat" cmpd="sng" algn="ctr">
+        <a:solidFill>
+          <a:schemeClr val="tx1">
+            <a:lumMod val="35000"/>
+            <a:lumOff val="65000"/>
+          </a:schemeClr>
+        </a:solidFill>
+        <a:round/>
+      </a:ln>
+    </cs:spPr>
+  </cs:dropLine>
+  <cs:errorBar>
+    <cs:lnRef idx="0"/>
+    <cs:fillRef idx="0"/>
+    <cs:effectRef idx="0"/>
+    <cs:fontRef idx="minor">
+      <a:schemeClr val="tx1"/>
+    </cs:fontRef>
+    <cs:spPr>
+      <a:ln w="9525" cap="flat" cmpd="sng" algn="ctr">
+        <a:solidFill>
+          <a:schemeClr val="tx1">
+            <a:lumMod val="65000"/>
+            <a:lumOff val="35000"/>
+          </a:schemeClr>
+        </a:solidFill>
+        <a:round/>
+      </a:ln>
+    </cs:spPr>
+  </cs:errorBar>
+  <cs:floor>
+    <cs:lnRef idx="0"/>
+    <cs:fillRef idx="0"/>
+    <cs:effectRef idx="0"/>
+    <cs:fontRef idx="minor">
+      <a:schemeClr val="tx1"/>
+    </cs:fontRef>
+  </cs:floor>
+  <cs:gridlineMajor>
+    <cs:lnRef idx="0"/>
+    <cs:fillRef idx="0"/>
+    <cs:effectRef idx="0"/>
+    <cs:fontRef idx="minor">
+      <a:schemeClr val="tx1"/>
+    </cs:fontRef>
+    <cs:spPr>
+      <a:ln w="9525" cap="flat" cmpd="sng" algn="ctr">
+        <a:solidFill>
+          <a:schemeClr val="tx1">
+            <a:lumMod val="15000"/>
+            <a:lumOff val="85000"/>
+          </a:schemeClr>
+        </a:solidFill>
+        <a:round/>
+      </a:ln>
+    </cs:spPr>
+  </cs:gridlineMajor>
+  <cs:gridlineMinor>
+    <cs:lnRef idx="0"/>
+    <cs:fillRef idx="0"/>
+    <cs:effectRef idx="0"/>
+    <cs:fontRef idx="minor">
+      <a:schemeClr val="tx1"/>
+    </cs:fontRef>
+    <cs:spPr>
+      <a:ln w="9525" cap="flat" cmpd="sng" algn="ctr">
+        <a:solidFill>
+          <a:schemeClr val="tx1">
+            <a:lumMod val="15000"/>
+            <a:lumOff val="85000"/>
+          </a:schemeClr>
+        </a:solidFill>
+        <a:round/>
+      </a:ln>
+    </cs:spPr>
+  </cs:gridlineMinor>
+  <cs:hiLoLine>
+    <cs:lnRef idx="0"/>
+    <cs:fillRef idx="0"/>
+    <cs:effectRef idx="0"/>
+    <cs:fontRef idx="minor">
+      <a:schemeClr val="tx1"/>
+    </cs:fontRef>
+    <cs:spPr>
+      <a:ln w="9525" cap="flat" cmpd="sng" algn="ctr">
+        <a:solidFill>
+          <a:schemeClr val="tx1">
+            <a:lumMod val="75000"/>
+            <a:lumOff val="25000"/>
+          </a:schemeClr>
+        </a:solidFill>
+        <a:round/>
+      </a:ln>
+    </cs:spPr>
+  </cs:hiLoLine>
+  <cs:leaderLine>
+    <cs:lnRef idx="0"/>
+    <cs:fillRef idx="0"/>
+    <cs:effectRef idx="0"/>
+    <cs:fontRef idx="minor">
+      <a:schemeClr val="tx1"/>
+    </cs:fontRef>
+    <cs:spPr>
+      <a:ln w="9525" cap="flat" cmpd="sng" algn="ctr">
+        <a:solidFill>
+          <a:schemeClr val="tx1">
+            <a:lumMod val="35000"/>
+            <a:lumOff val="65000"/>
+          </a:schemeClr>
+        </a:solidFill>
+        <a:round/>
+      </a:ln>
+    </cs:spPr>
+  </cs:leaderLine>
+  <cs:legend>
+    <cs:lnRef idx="0"/>
+    <cs:fillRef idx="0"/>
+    <cs:effectRef idx="0"/>
+    <cs:fontRef idx="minor">
+      <a:schemeClr val="tx1">
+        <a:lumMod val="65000"/>
+        <a:lumOff val="35000"/>
+      </a:schemeClr>
+    </cs:fontRef>
+    <cs:defRPr sz="1197"/>
+  </cs:legend>
+  <cs:plotArea mods="allowNoFillOverride allowNoLineOverride">
+    <cs:lnRef idx="0"/>
+    <cs:fillRef idx="0"/>
+    <cs:effectRef idx="0"/>
+    <cs:fontRef idx="minor">
+      <a:schemeClr val="tx1"/>
+    </cs:fontRef>
+  </cs:plotArea>
+  <cs:plotArea3D mods="allowNoFillOverride allowNoLineOverride">
+    <cs:lnRef idx="0"/>
+    <cs:fillRef idx="0"/>
+    <cs:effectRef idx="0"/>
+    <cs:fontRef idx="minor">
+      <a:schemeClr val="tx1"/>
+    </cs:fontRef>
+  </cs:plotArea3D>
+  <cs:seriesAxis>
+    <cs:lnRef idx="0"/>
+    <cs:fillRef idx="0"/>
+    <cs:effectRef idx="0"/>
+    <cs:fontRef idx="minor">
+      <a:schemeClr val="tx1">
+        <a:lumMod val="65000"/>
+        <a:lumOff val="35000"/>
+      </a:schemeClr>
+    </cs:fontRef>
+    <cs:spPr>
+      <a:ln w="9525" cap="flat" cmpd="sng" algn="ctr">
+        <a:solidFill>
+          <a:schemeClr val="tx1">
+            <a:lumMod val="15000"/>
+            <a:lumOff val="85000"/>
+          </a:schemeClr>
+        </a:solidFill>
+        <a:round/>
+      </a:ln>
+    </cs:spPr>
+    <cs:defRPr sz="1197"/>
+  </cs:seriesAxis>
+  <cs:seriesLine>
+    <cs:lnRef idx="0"/>
+    <cs:fillRef idx="0"/>
+    <cs:effectRef idx="0"/>
+    <cs:fontRef idx="minor">
+      <a:schemeClr val="tx1"/>
+    </cs:fontRef>
+    <cs:spPr>
+      <a:ln w="9525" cap="flat">
+        <a:solidFill>
+          <a:srgbClr val="D9D9D9"/>
+        </a:solidFill>
+        <a:round/>
+      </a:ln>
+    </cs:spPr>
+  </cs:seriesLine>
+  <cs:title>
+    <cs:lnRef idx="0"/>
+    <cs:fillRef idx="0"/>
+    <cs:effectRef idx="0"/>
+    <cs:fontRef idx="minor">
+      <a:schemeClr val="tx1">
+        <a:lumMod val="65000"/>
+        <a:lumOff val="35000"/>
+      </a:schemeClr>
+    </cs:fontRef>
+    <cs:defRPr sz="1862"/>
+  </cs:title>
+  <cs:trendline>
+    <cs:lnRef idx="0">
+      <cs:styleClr val="auto"/>
+    </cs:lnRef>
+    <cs:fillRef idx="0"/>
+    <cs:effectRef idx="0"/>
+    <cs:fontRef idx="minor">
+      <a:schemeClr val="tx1"/>
+    </cs:fontRef>
+    <cs:spPr>
+      <a:ln w="19050" cap="rnd">
+        <a:solidFill>
+          <a:schemeClr val="phClr"/>
+        </a:solidFill>
+        <a:prstDash val="sysDash"/>
+      </a:ln>
+    </cs:spPr>
+  </cs:trendline>
+  <cs:trendlineLabel>
+    <cs:lnRef idx="0"/>
+    <cs:fillRef idx="0"/>
+    <cs:effectRef idx="0"/>
+    <cs:fontRef idx="minor">
+      <a:schemeClr val="tx1">
+        <a:lumMod val="65000"/>
+        <a:lumOff val="35000"/>
+      </a:schemeClr>
+    </cs:fontRef>
+    <cs:defRPr sz="1197"/>
+  </cs:trendlineLabel>
+  <cs:upBar>
+    <cs:lnRef idx="0"/>
+    <cs:fillRef idx="0"/>
+    <cs:effectRef idx="0"/>
+    <cs:fontRef idx="minor">
+      <a:schemeClr val="dk1"/>
+    </cs:fontRef>
+    <cs:spPr>
+      <a:solidFill>
+        <a:schemeClr val="lt1"/>
+      </a:solidFill>
+      <a:ln w="9525">
+        <a:solidFill>
+          <a:schemeClr val="tx1">
+            <a:lumMod val="15000"/>
+            <a:lumOff val="85000"/>
+          </a:schemeClr>
+        </a:solidFill>
+      </a:ln>
+    </cs:spPr>
+  </cs:upBar>
+  <cs:valueAxis>
+    <cs:lnRef idx="0"/>
+    <cs:fillRef idx="0"/>
+    <cs:effectRef idx="0"/>
+    <cs:fontRef idx="minor">
+      <a:schemeClr val="tx1">
+        <a:lumMod val="65000"/>
+        <a:lumOff val="35000"/>
+      </a:schemeClr>
+    </cs:fontRef>
+    <cs:defRPr sz="1197"/>
+  </cs:valueAxis>
+  <cs:wall>
+    <cs:lnRef idx="0"/>
+    <cs:fillRef idx="0"/>
+    <cs:effectRef idx="0"/>
+    <cs:fontRef idx="minor">
+      <a:schemeClr val="tx1"/>
+    </cs:fontRef>
+  </cs:wall>
+</cs:chartStyle>
+</file>
+
+<file path=ppt/charts/style20.xml><?xml version="1.0" encoding="utf-8"?>
+<cs:chartStyle xmlns:cs="http://schemas.microsoft.com/office/drawing/2012/chartStyle" xmlns:a="http://schemas.openxmlformats.org/drawingml/2006/main" id="419">
+  <cs:axisTitle>
+    <cs:lnRef idx="0"/>
+    <cs:fillRef idx="0"/>
+    <cs:effectRef idx="0"/>
+    <cs:fontRef idx="minor">
+      <a:schemeClr val="tx1">
+        <a:lumMod val="65000"/>
+        <a:lumOff val="35000"/>
+      </a:schemeClr>
+    </cs:fontRef>
+    <cs:defRPr sz="1197"/>
+  </cs:axisTitle>
+  <cs:categoryAxis>
+    <cs:lnRef idx="0"/>
+    <cs:fillRef idx="0"/>
+    <cs:effectRef idx="0"/>
+    <cs:fontRef idx="minor">
+      <a:schemeClr val="tx1">
+        <a:lumMod val="65000"/>
+        <a:lumOff val="35000"/>
+      </a:schemeClr>
+    </cs:fontRef>
+    <cs:spPr>
+      <a:ln w="9525" cap="flat" cmpd="sng" algn="ctr">
+        <a:solidFill>
+          <a:schemeClr val="tx1">
+            <a:lumMod val="15000"/>
+            <a:lumOff val="85000"/>
+          </a:schemeClr>
+        </a:solidFill>
+        <a:round/>
+      </a:ln>
+    </cs:spPr>
+    <cs:defRPr sz="1197"/>
+  </cs:categoryAxis>
+  <cs:chartArea mods="allowNoFillOverride allowNoLineOverride">
+    <cs:lnRef idx="0"/>
+    <cs:fillRef idx="0"/>
+    <cs:effectRef idx="0"/>
+    <cs:fontRef idx="minor">
+      <a:schemeClr val="tx1"/>
+    </cs:fontRef>
+    <cs:spPr>
+      <a:solidFill>
+        <a:schemeClr val="bg1"/>
+      </a:solidFill>
+      <a:ln w="9525" cap="flat" cmpd="sng" algn="ctr">
+        <a:solidFill>
+          <a:schemeClr val="tx1">
+            <a:lumMod val="15000"/>
+            <a:lumOff val="85000"/>
+          </a:schemeClr>
+        </a:solidFill>
+        <a:round/>
+      </a:ln>
+    </cs:spPr>
+    <cs:defRPr sz="1330"/>
+  </cs:chartArea>
+  <cs:dataLabel>
+    <cs:lnRef idx="0"/>
+    <cs:fillRef idx="0"/>
+    <cs:effectRef idx="0"/>
+    <cs:fontRef idx="minor">
+      <a:schemeClr val="tx1">
+        <a:lumMod val="65000"/>
+        <a:lumOff val="35000"/>
+      </a:schemeClr>
+    </cs:fontRef>
+    <cs:defRPr sz="1197"/>
+  </cs:dataLabel>
+  <cs:dataLabelCallout>
+    <cs:lnRef idx="0"/>
+    <cs:fillRef idx="0"/>
+    <cs:effectRef idx="0"/>
+    <cs:fontRef idx="minor">
+      <a:schemeClr val="dk1">
+        <a:lumMod val="65000"/>
+        <a:lumOff val="35000"/>
+      </a:schemeClr>
+    </cs:fontRef>
+    <cs:spPr>
+      <a:solidFill>
+        <a:schemeClr val="lt1"/>
+      </a:solidFill>
+      <a:ln>
+        <a:solidFill>
+          <a:schemeClr val="dk1">
+            <a:lumMod val="25000"/>
+            <a:lumOff val="75000"/>
+          </a:schemeClr>
+        </a:solidFill>
+      </a:ln>
+    </cs:spPr>
+    <cs:defRPr sz="1197"/>
+    <cs:bodyPr rot="0" spcFirstLastPara="1" vertOverflow="clip" horzOverflow="clip" vert="horz" wrap="square" lIns="36576" tIns="18288" rIns="36576" bIns="18288" anchor="ctr" anchorCtr="1">
+      <a:spAutoFit/>
+    </cs:bodyPr>
+  </cs:dataLabelCallout>
+  <cs:dataPoint>
+    <cs:lnRef idx="0"/>
+    <cs:fillRef idx="0">
+      <cs:styleClr val="auto"/>
+    </cs:fillRef>
+    <cs:effectRef idx="0"/>
+    <cs:fontRef idx="minor">
+      <a:schemeClr val="tx1"/>
+    </cs:fontRef>
+    <cs:spPr>
+      <a:solidFill>
+        <a:schemeClr val="phClr"/>
+      </a:solidFill>
+    </cs:spPr>
+  </cs:dataPoint>
+  <cs:dataPoint3D>
+    <cs:lnRef idx="0"/>
+    <cs:fillRef idx="0">
+      <cs:styleClr val="auto"/>
+    </cs:fillRef>
+    <cs:effectRef idx="0"/>
+    <cs:fontRef idx="minor">
+      <a:schemeClr val="tx1"/>
+    </cs:fontRef>
+    <cs:spPr>
+      <a:solidFill>
+        <a:schemeClr val="phClr"/>
+      </a:solidFill>
+    </cs:spPr>
+  </cs:dataPoint3D>
+  <cs:dataPointLine>
+    <cs:lnRef idx="0">
+      <cs:styleClr val="auto"/>
+    </cs:lnRef>
+    <cs:fillRef idx="0"/>
+    <cs:effectRef idx="0"/>
+    <cs:fontRef idx="minor">
+      <a:schemeClr val="tx1"/>
+    </cs:fontRef>
+    <cs:spPr>
+      <a:ln w="28575" cap="rnd">
+        <a:solidFill>
+          <a:schemeClr val="phClr"/>
+        </a:solidFill>
+        <a:round/>
+      </a:ln>
+    </cs:spPr>
+  </cs:dataPointLine>
+  <cs:dataPointMarker>
+    <cs:lnRef idx="0"/>
+    <cs:fillRef idx="0">
+      <cs:styleClr val="auto"/>
+    </cs:fillRef>
+    <cs:effectRef idx="0"/>
+    <cs:fontRef idx="minor">
+      <a:schemeClr val="tx1"/>
+    </cs:fontRef>
+    <cs:spPr>
+      <a:solidFill>
+        <a:schemeClr val="phClr"/>
+      </a:solidFill>
+      <a:ln w="9525">
+        <a:solidFill>
+          <a:schemeClr val="lt1"/>
+        </a:solidFill>
+      </a:ln>
+    </cs:spPr>
+  </cs:dataPointMarker>
+  <cs:dataPointMarkerLayout symbol="circle" size="5"/>
+  <cs:dataPointWireframe>
+    <cs:lnRef idx="0">
+      <cs:styleClr val="auto"/>
+    </cs:lnRef>
+    <cs:fillRef idx="0"/>
+    <cs:effectRef idx="0"/>
+    <cs:fontRef idx="minor">
+      <a:schemeClr val="tx1"/>
+    </cs:fontRef>
+    <cs:spPr>
+      <a:ln w="28575" cap="rnd">
+        <a:solidFill>
+          <a:schemeClr val="phClr"/>
+        </a:solidFill>
+        <a:round/>
+      </a:ln>
+    </cs:spPr>
+  </cs:dataPointWireframe>
+  <cs:dataTable>
+    <cs:lnRef idx="0"/>
+    <cs:fillRef idx="0"/>
+    <cs:effectRef idx="0"/>
+    <cs:fontRef idx="minor">
+      <a:schemeClr val="tx1">
+        <a:lumMod val="65000"/>
+        <a:lumOff val="35000"/>
+      </a:schemeClr>
+    </cs:fontRef>
+    <cs:spPr>
+      <a:ln w="9525">
+        <a:solidFill>
+          <a:schemeClr val="tx1">
+            <a:lumMod val="15000"/>
+            <a:lumOff val="85000"/>
+          </a:schemeClr>
+        </a:solidFill>
+      </a:ln>
+    </cs:spPr>
+    <cs:defRPr sz="1197"/>
+  </cs:dataTable>
+  <cs:downBar>
+    <cs:lnRef idx="0"/>
+    <cs:fillRef idx="0"/>
+    <cs:effectRef idx="0"/>
+    <cs:fontRef idx="minor">
+      <a:schemeClr val="dk1"/>
+    </cs:fontRef>
+    <cs:spPr>
+      <a:solidFill>
+        <a:schemeClr val="dk1">
+          <a:lumMod val="65000"/>
+          <a:lumOff val="35000"/>
+        </a:schemeClr>
+      </a:solidFill>
+      <a:ln w="9525">
+        <a:solidFill>
+          <a:schemeClr val="tx1">
+            <a:lumMod val="65000"/>
+            <a:lumOff val="35000"/>
+          </a:schemeClr>
+        </a:solidFill>
+      </a:ln>
+    </cs:spPr>
+  </cs:downBar>
+  <cs:dropLine>
+    <cs:lnRef idx="0"/>
+    <cs:fillRef idx="0"/>
+    <cs:effectRef idx="0"/>
+    <cs:fontRef idx="minor">
+      <a:schemeClr val="tx1"/>
+    </cs:fontRef>
+    <cs:spPr>
+      <a:ln w="9525" cap="flat" cmpd="sng" algn="ctr">
+        <a:solidFill>
+          <a:schemeClr val="tx1">
+            <a:lumMod val="35000"/>
+            <a:lumOff val="65000"/>
+          </a:schemeClr>
+        </a:solidFill>
+        <a:round/>
+      </a:ln>
+    </cs:spPr>
+  </cs:dropLine>
+  <cs:errorBar>
+    <cs:lnRef idx="0"/>
+    <cs:fillRef idx="0"/>
+    <cs:effectRef idx="0"/>
+    <cs:fontRef idx="minor">
+      <a:schemeClr val="tx1"/>
+    </cs:fontRef>
+    <cs:spPr>
+      <a:ln w="9525" cap="flat" cmpd="sng" algn="ctr">
+        <a:solidFill>
+          <a:schemeClr val="tx1">
+            <a:lumMod val="65000"/>
+            <a:lumOff val="35000"/>
+          </a:schemeClr>
+        </a:solidFill>
+        <a:round/>
+      </a:ln>
+    </cs:spPr>
+  </cs:errorBar>
+  <cs:floor>
+    <cs:lnRef idx="0"/>
+    <cs:fillRef idx="0"/>
+    <cs:effectRef idx="0"/>
+    <cs:fontRef idx="minor">
+      <a:schemeClr val="tx1"/>
+    </cs:fontRef>
+  </cs:floor>
+  <cs:gridlineMajor>
+    <cs:lnRef idx="0"/>
+    <cs:fillRef idx="0"/>
+    <cs:effectRef idx="0"/>
+    <cs:fontRef idx="minor">
+      <a:schemeClr val="tx1"/>
+    </cs:fontRef>
+    <cs:spPr>
+      <a:ln w="9525" cap="flat" cmpd="sng" algn="ctr">
+        <a:solidFill>
+          <a:schemeClr val="tx1">
+            <a:lumMod val="15000"/>
+            <a:lumOff val="85000"/>
+          </a:schemeClr>
+        </a:solidFill>
+        <a:round/>
+      </a:ln>
+    </cs:spPr>
+  </cs:gridlineMajor>
+  <cs:gridlineMinor>
+    <cs:lnRef idx="0"/>
+    <cs:fillRef idx="0"/>
+    <cs:effectRef idx="0"/>
+    <cs:fontRef idx="minor">
+      <a:schemeClr val="tx1"/>
+    </cs:fontRef>
+    <cs:spPr>
+      <a:ln w="9525" cap="flat" cmpd="sng" algn="ctr">
+        <a:solidFill>
+          <a:schemeClr val="tx1">
+            <a:lumMod val="15000"/>
+            <a:lumOff val="85000"/>
+          </a:schemeClr>
+        </a:solidFill>
+        <a:round/>
+      </a:ln>
+    </cs:spPr>
+  </cs:gridlineMinor>
+  <cs:hiLoLine>
+    <cs:lnRef idx="0"/>
+    <cs:fillRef idx="0"/>
+    <cs:effectRef idx="0"/>
+    <cs:fontRef idx="minor">
+      <a:schemeClr val="tx1"/>
+    </cs:fontRef>
+    <cs:spPr>
+      <a:ln w="9525" cap="flat" cmpd="sng" algn="ctr">
+        <a:solidFill>
+          <a:schemeClr val="tx1">
+            <a:lumMod val="75000"/>
+            <a:lumOff val="25000"/>
+          </a:schemeClr>
+        </a:solidFill>
+        <a:round/>
+      </a:ln>
+    </cs:spPr>
+  </cs:hiLoLine>
+  <cs:leaderLine>
+    <cs:lnRef idx="0"/>
+    <cs:fillRef idx="0"/>
+    <cs:effectRef idx="0"/>
+    <cs:fontRef idx="minor">
+      <a:schemeClr val="tx1"/>
+    </cs:fontRef>
+    <cs:spPr>
+      <a:ln w="9525" cap="flat" cmpd="sng" algn="ctr">
+        <a:solidFill>
+          <a:schemeClr val="tx1">
+            <a:lumMod val="35000"/>
+            <a:lumOff val="65000"/>
+          </a:schemeClr>
+        </a:solidFill>
+        <a:round/>
+      </a:ln>
+    </cs:spPr>
+  </cs:leaderLine>
+  <cs:legend>
+    <cs:lnRef idx="0"/>
+    <cs:fillRef idx="0"/>
+    <cs:effectRef idx="0"/>
+    <cs:fontRef idx="minor">
+      <a:schemeClr val="tx1">
+        <a:lumMod val="65000"/>
+        <a:lumOff val="35000"/>
+      </a:schemeClr>
+    </cs:fontRef>
+    <cs:defRPr sz="1197"/>
+  </cs:legend>
+  <cs:plotArea mods="allowNoFillOverride allowNoLineOverride">
+    <cs:lnRef idx="0"/>
+    <cs:fillRef idx="0"/>
+    <cs:effectRef idx="0"/>
+    <cs:fontRef idx="minor">
+      <a:schemeClr val="tx1"/>
+    </cs:fontRef>
+  </cs:plotArea>
+  <cs:plotArea3D mods="allowNoFillOverride allowNoLineOverride">
+    <cs:lnRef idx="0"/>
+    <cs:fillRef idx="0"/>
+    <cs:effectRef idx="0"/>
+    <cs:fontRef idx="minor">
+      <a:schemeClr val="tx1"/>
+    </cs:fontRef>
+  </cs:plotArea3D>
+  <cs:seriesAxis>
+    <cs:lnRef idx="0"/>
+    <cs:fillRef idx="0"/>
+    <cs:effectRef idx="0"/>
+    <cs:fontRef idx="minor">
+      <a:schemeClr val="tx1">
+        <a:lumMod val="65000"/>
+        <a:lumOff val="35000"/>
+      </a:schemeClr>
+    </cs:fontRef>
+    <cs:spPr>
+      <a:ln w="9525" cap="flat" cmpd="sng" algn="ctr">
+        <a:solidFill>
+          <a:schemeClr val="tx1">
+            <a:lumMod val="15000"/>
+            <a:lumOff val="85000"/>
+          </a:schemeClr>
+        </a:solidFill>
+        <a:round/>
+      </a:ln>
+    </cs:spPr>
+    <cs:defRPr sz="1197"/>
+  </cs:seriesAxis>
+  <cs:seriesLine>
+    <cs:lnRef idx="0"/>
+    <cs:fillRef idx="0"/>
+    <cs:effectRef idx="0"/>
+    <cs:fontRef idx="minor">
+      <a:schemeClr val="tx1"/>
+    </cs:fontRef>
+    <cs:spPr>
+      <a:ln w="9525" cap="flat">
+        <a:solidFill>
+          <a:srgbClr val="D9D9D9"/>
+        </a:solidFill>
+        <a:round/>
+      </a:ln>
+    </cs:spPr>
+  </cs:seriesLine>
+  <cs:title>
+    <cs:lnRef idx="0"/>
+    <cs:fillRef idx="0"/>
+    <cs:effectRef idx="0"/>
+    <cs:fontRef idx="minor">
+      <a:schemeClr val="tx1">
+        <a:lumMod val="65000"/>
+        <a:lumOff val="35000"/>
+      </a:schemeClr>
+    </cs:fontRef>
+    <cs:defRPr sz="1862"/>
+  </cs:title>
+  <cs:trendline>
+    <cs:lnRef idx="0">
+      <cs:styleClr val="auto"/>
+    </cs:lnRef>
+    <cs:fillRef idx="0"/>
+    <cs:effectRef idx="0"/>
+    <cs:fontRef idx="minor">
+      <a:schemeClr val="tx1"/>
+    </cs:fontRef>
+    <cs:spPr>
+      <a:ln w="19050" cap="rnd">
+        <a:solidFill>
+          <a:schemeClr val="phClr"/>
+        </a:solidFill>
+        <a:prstDash val="sysDash"/>
+      </a:ln>
+    </cs:spPr>
+  </cs:trendline>
+  <cs:trendlineLabel>
+    <cs:lnRef idx="0"/>
+    <cs:fillRef idx="0"/>
+    <cs:effectRef idx="0"/>
+    <cs:fontRef idx="minor">
+      <a:schemeClr val="tx1">
+        <a:lumMod val="65000"/>
+        <a:lumOff val="35000"/>
+      </a:schemeClr>
+    </cs:fontRef>
+    <cs:defRPr sz="1197"/>
+  </cs:trendlineLabel>
+  <cs:upBar>
+    <cs:lnRef idx="0"/>
+    <cs:fillRef idx="0"/>
+    <cs:effectRef idx="0"/>
+    <cs:fontRef idx="minor">
+      <a:schemeClr val="dk1"/>
+    </cs:fontRef>
+    <cs:spPr>
+      <a:solidFill>
+        <a:schemeClr val="lt1"/>
+      </a:solidFill>
+      <a:ln w="9525">
+        <a:solidFill>
+          <a:schemeClr val="tx1">
+            <a:lumMod val="15000"/>
+            <a:lumOff val="85000"/>
+          </a:schemeClr>
+        </a:solidFill>
+      </a:ln>
+    </cs:spPr>
+  </cs:upBar>
+  <cs:valueAxis>
+    <cs:lnRef idx="0"/>
+    <cs:fillRef idx="0"/>
+    <cs:effectRef idx="0"/>
+    <cs:fontRef idx="minor">
+      <a:schemeClr val="tx1">
+        <a:lumMod val="65000"/>
+        <a:lumOff val="35000"/>
+      </a:schemeClr>
+    </cs:fontRef>
+    <cs:defRPr sz="1197"/>
+  </cs:valueAxis>
+  <cs:wall>
+    <cs:lnRef idx="0"/>
+    <cs:fillRef idx="0"/>
+    <cs:effectRef idx="0"/>
+    <cs:fontRef idx="minor">
+      <a:schemeClr val="tx1"/>
+    </cs:fontRef>
+  </cs:wall>
+</cs:chartStyle>
 </file>
 
 <file path=ppt/slideLayouts/slideLayout1.xml><?xml version="1.0" encoding="utf-8"?>
